--- a/Thesis/Development of a root-state and child-state abstraction algorithm.pptx
+++ b/Thesis/Development of a root-state and child-state abstraction algorithm.pptx
@@ -5,10 +5,10 @@
     <p:sldMasterId id="2147483648" r:id="rId4"/>
   </p:sldMasterIdLst>
   <p:notesMasterIdLst>
-    <p:notesMasterId r:id="rId18"/>
+    <p:notesMasterId r:id="rId19"/>
   </p:notesMasterIdLst>
   <p:handoutMasterIdLst>
-    <p:handoutMasterId r:id="rId19"/>
+    <p:handoutMasterId r:id="rId20"/>
   </p:handoutMasterIdLst>
   <p:sldIdLst>
     <p:sldId id="263" r:id="rId5"/>
@@ -18,12 +18,13 @@
     <p:sldId id="268" r:id="rId9"/>
     <p:sldId id="269" r:id="rId10"/>
     <p:sldId id="264" r:id="rId11"/>
-    <p:sldId id="265" r:id="rId12"/>
-    <p:sldId id="266" r:id="rId13"/>
-    <p:sldId id="270" r:id="rId14"/>
-    <p:sldId id="273" r:id="rId15"/>
+    <p:sldId id="274" r:id="rId12"/>
+    <p:sldId id="265" r:id="rId13"/>
+    <p:sldId id="266" r:id="rId14"/>
+    <p:sldId id="270" r:id="rId15"/>
     <p:sldId id="271" r:id="rId16"/>
-    <p:sldId id="272" r:id="rId17"/>
+    <p:sldId id="273" r:id="rId17"/>
+    <p:sldId id="272" r:id="rId18"/>
   </p:sldIdLst>
   <p:sldSz cx="9144000" cy="5143500" type="screen16x9"/>
   <p:notesSz cx="6858000" cy="9144000"/>
@@ -8152,7 +8153,7 @@
           <p:cNvPr id="2" name="Titel 1">
             <a:extLst>
               <a:ext uri="{FF2B5EF4-FFF2-40B4-BE49-F238E27FC236}">
-                <a16:creationId xmlns:a16="http://schemas.microsoft.com/office/drawing/2014/main" id="{07E6EFA4-F25C-CD00-A446-F85EAC4532BF}"/>
+                <a16:creationId xmlns:a16="http://schemas.microsoft.com/office/drawing/2014/main" id="{DC2402EF-DB24-CC4D-790D-D495AEE1BDFE}"/>
               </a:ext>
             </a:extLst>
           </p:cNvPr>
@@ -8172,7 +8173,7 @@
           <a:p>
             <a:r>
               <a:rPr lang="en-US" noProof="0" dirty="0"/>
-              <a:t>Results – Time and Memory Overhead</a:t>
+              <a:t>Results – Policy Agreement &amp; Q-value Error </a:t>
             </a:r>
           </a:p>
         </p:txBody>
@@ -8182,7 +8183,7 @@
           <p:cNvPr id="3" name="Textplatzhalter 2">
             <a:extLst>
               <a:ext uri="{FF2B5EF4-FFF2-40B4-BE49-F238E27FC236}">
-                <a16:creationId xmlns:a16="http://schemas.microsoft.com/office/drawing/2014/main" id="{0B65076A-E034-85A6-35F5-83C25AB907A7}"/>
+                <a16:creationId xmlns:a16="http://schemas.microsoft.com/office/drawing/2014/main" id="{9F889880-B199-B6DB-E107-844A3B932C8A}"/>
               </a:ext>
             </a:extLst>
           </p:cNvPr>
@@ -8200,46 +8201,25 @@
           <a:p>
             <a:r>
               <a:rPr lang="en-US" noProof="0" dirty="0"/>
-              <a:t>No significant memory overhead</a:t>
-            </a:r>
-          </a:p>
-          <a:p>
-            <a:r>
-              <a:rPr lang="en-US" noProof="0" dirty="0" err="1"/>
-              <a:t>Extrem</a:t>
-            </a:r>
+              <a:t>Policy agreement never below 99,6 percent</a:t>
+            </a:r>
+          </a:p>
+          <a:p>
             <a:r>
               <a:rPr lang="en-US" noProof="0" dirty="0"/>
-              <a:t> time overhead</a:t>
+              <a:t>Average q-error less than 0,5</a:t>
             </a:r>
           </a:p>
           <a:p>
             <a:r>
               <a:rPr lang="en-US" noProof="0" dirty="0"/>
-              <a:t>Time </a:t>
-            </a:r>
-            <a:r>
-              <a:rPr lang="en-US" noProof="0" dirty="0" err="1"/>
-              <a:t>vverhead</a:t>
-            </a:r>
+              <a:t>Game performance nearly identical</a:t>
+            </a:r>
+          </a:p>
+          <a:p>
             <a:r>
               <a:rPr lang="en-US" noProof="0" dirty="0"/>
-              <a:t> increased with </a:t>
-            </a:r>
-            <a:br>
-              <a:rPr lang="en-US" noProof="0" dirty="0"/>
-            </a:br>
-            <a:r>
-              <a:rPr lang="en-US" noProof="0" dirty="0"/>
-              <a:t>each „</a:t>
-            </a:r>
-            <a:r>
-              <a:rPr lang="en-US" noProof="0" dirty="0" err="1"/>
-              <a:t>PreCalculator</a:t>
-            </a:r>
-            <a:r>
-              <a:rPr lang="en-US" noProof="0" dirty="0"/>
-              <a:t>“ depth</a:t>
+              <a:t>But q-values not the same</a:t>
             </a:r>
           </a:p>
           <a:p>
@@ -8255,7 +8235,7 @@
           <p:cNvPr id="4" name="Fußzeilenplatzhalter 3">
             <a:extLst>
               <a:ext uri="{FF2B5EF4-FFF2-40B4-BE49-F238E27FC236}">
-                <a16:creationId xmlns:a16="http://schemas.microsoft.com/office/drawing/2014/main" id="{239E5EA8-6EF6-E6F2-803C-A59E9B7B5F3E}"/>
+                <a16:creationId xmlns:a16="http://schemas.microsoft.com/office/drawing/2014/main" id="{4FCD61B2-C647-5CC6-45DC-158F98212E36}"/>
               </a:ext>
             </a:extLst>
           </p:cNvPr>
@@ -8283,7 +8263,7 @@
           <p:cNvPr id="5" name="Foliennummernplatzhalter 4">
             <a:extLst>
               <a:ext uri="{FF2B5EF4-FFF2-40B4-BE49-F238E27FC236}">
-                <a16:creationId xmlns:a16="http://schemas.microsoft.com/office/drawing/2014/main" id="{A5E878D4-C22F-5375-5D54-D04B821808DD}"/>
+                <a16:creationId xmlns:a16="http://schemas.microsoft.com/office/drawing/2014/main" id="{2010D757-2494-8C2B-0312-CC46032B644F}"/>
               </a:ext>
             </a:extLst>
           </p:cNvPr>
@@ -8310,10 +8290,10 @@
       </p:sp>
       <p:graphicFrame>
         <p:nvGraphicFramePr>
-          <p:cNvPr id="6" name="Diagramm 5">
+          <p:cNvPr id="6" name="Chart 0">
             <a:extLst>
               <a:ext uri="{FF2B5EF4-FFF2-40B4-BE49-F238E27FC236}">
-                <a16:creationId xmlns:a16="http://schemas.microsoft.com/office/drawing/2014/main" id="{89504AE7-3541-A10C-FC2A-8AA120559F41}"/>
+                <a16:creationId xmlns:a16="http://schemas.microsoft.com/office/drawing/2014/main" id="{1323C5CB-7318-280D-4E82-E1FAD85D71BA}"/>
               </a:ext>
             </a:extLst>
           </p:cNvPr>
@@ -8321,7 +8301,254 @@
           <p:nvPr>
             <p:extLst>
               <p:ext uri="{D42A27DB-BD31-4B8C-83A1-F6EECF244321}">
-                <p14:modId xmlns:p14="http://schemas.microsoft.com/office/powerpoint/2010/main" val="542721433"/>
+                <p14:modId xmlns:p14="http://schemas.microsoft.com/office/powerpoint/2010/main" val="2268078932"/>
+              </p:ext>
+            </p:extLst>
+          </p:nvPr>
+        </p:nvGraphicFramePr>
+        <p:xfrm>
+          <a:off x="377946" y="2131022"/>
+          <a:ext cx="4058049" cy="2370028"/>
+        </p:xfrm>
+        <a:graphic>
+          <a:graphicData uri="http://schemas.openxmlformats.org/drawingml/2006/chart">
+            <c:chart xmlns:c="http://schemas.openxmlformats.org/drawingml/2006/chart" xmlns:r="http://schemas.openxmlformats.org/officeDocument/2006/relationships" r:id="rId2"/>
+          </a:graphicData>
+        </a:graphic>
+      </p:graphicFrame>
+      <p:graphicFrame>
+        <p:nvGraphicFramePr>
+          <p:cNvPr id="7" name="Chart 1">
+            <a:extLst>
+              <a:ext uri="{FF2B5EF4-FFF2-40B4-BE49-F238E27FC236}">
+                <a16:creationId xmlns:a16="http://schemas.microsoft.com/office/drawing/2014/main" id="{C2D234A8-907F-7C02-4820-525F84344AD0}"/>
+              </a:ext>
+            </a:extLst>
+          </p:cNvPr>
+          <p:cNvGraphicFramePr/>
+          <p:nvPr>
+            <p:extLst>
+              <p:ext uri="{D42A27DB-BD31-4B8C-83A1-F6EECF244321}">
+                <p14:modId xmlns:p14="http://schemas.microsoft.com/office/powerpoint/2010/main" val="4047696697"/>
+              </p:ext>
+            </p:extLst>
+          </p:nvPr>
+        </p:nvGraphicFramePr>
+        <p:xfrm>
+          <a:off x="4633940" y="2131022"/>
+          <a:ext cx="4272194" cy="2508408"/>
+        </p:xfrm>
+        <a:graphic>
+          <a:graphicData uri="http://schemas.openxmlformats.org/drawingml/2006/chart">
+            <c:chart xmlns:c="http://schemas.openxmlformats.org/drawingml/2006/chart" xmlns:r="http://schemas.openxmlformats.org/officeDocument/2006/relationships" r:id="rId3"/>
+          </a:graphicData>
+        </a:graphic>
+      </p:graphicFrame>
+    </p:spTree>
+    <p:extLst>
+      <p:ext uri="{BB962C8B-B14F-4D97-AF65-F5344CB8AC3E}">
+        <p14:creationId xmlns:p14="http://schemas.microsoft.com/office/powerpoint/2010/main" val="3829154241"/>
+      </p:ext>
+    </p:extLst>
+  </p:cSld>
+  <p:clrMapOvr>
+    <a:masterClrMapping/>
+  </p:clrMapOvr>
+</p:sld>
+</file>
+
+<file path=ppt/slides/slide11.xml><?xml version="1.0" encoding="utf-8"?>
+<p:sld xmlns:a="http://schemas.openxmlformats.org/drawingml/2006/main" xmlns:r="http://schemas.openxmlformats.org/officeDocument/2006/relationships" xmlns:p="http://schemas.openxmlformats.org/presentationml/2006/main">
+  <p:cSld>
+    <p:spTree>
+      <p:nvGrpSpPr>
+        <p:cNvPr id="1" name=""/>
+        <p:cNvGrpSpPr/>
+        <p:nvPr/>
+      </p:nvGrpSpPr>
+      <p:grpSpPr>
+        <a:xfrm>
+          <a:off x="0" y="0"/>
+          <a:ext cx="0" cy="0"/>
+          <a:chOff x="0" y="0"/>
+          <a:chExt cx="0" cy="0"/>
+        </a:xfrm>
+      </p:grpSpPr>
+      <p:sp>
+        <p:nvSpPr>
+          <p:cNvPr id="2" name="Titel 1">
+            <a:extLst>
+              <a:ext uri="{FF2B5EF4-FFF2-40B4-BE49-F238E27FC236}">
+                <a16:creationId xmlns:a16="http://schemas.microsoft.com/office/drawing/2014/main" id="{07E6EFA4-F25C-CD00-A446-F85EAC4532BF}"/>
+              </a:ext>
+            </a:extLst>
+          </p:cNvPr>
+          <p:cNvSpPr>
+            <a:spLocks noGrp="1"/>
+          </p:cNvSpPr>
+          <p:nvPr>
+            <p:ph type="title"/>
+          </p:nvPr>
+        </p:nvSpPr>
+        <p:spPr/>
+        <p:txBody>
+          <a:bodyPr>
+            <a:normAutofit fontScale="90000"/>
+          </a:bodyPr>
+          <a:lstStyle/>
+          <a:p>
+            <a:r>
+              <a:rPr lang="en-US" noProof="0" dirty="0"/>
+              <a:t>Results – Time and Memory Overhead</a:t>
+            </a:r>
+          </a:p>
+        </p:txBody>
+      </p:sp>
+      <p:sp>
+        <p:nvSpPr>
+          <p:cNvPr id="3" name="Textplatzhalter 2">
+            <a:extLst>
+              <a:ext uri="{FF2B5EF4-FFF2-40B4-BE49-F238E27FC236}">
+                <a16:creationId xmlns:a16="http://schemas.microsoft.com/office/drawing/2014/main" id="{0B65076A-E034-85A6-35F5-83C25AB907A7}"/>
+              </a:ext>
+            </a:extLst>
+          </p:cNvPr>
+          <p:cNvSpPr>
+            <a:spLocks noGrp="1"/>
+          </p:cNvSpPr>
+          <p:nvPr>
+            <p:ph type="body" sz="quarter" idx="14"/>
+          </p:nvPr>
+        </p:nvSpPr>
+        <p:spPr/>
+        <p:txBody>
+          <a:bodyPr/>
+          <a:lstStyle/>
+          <a:p>
+            <a:r>
+              <a:rPr lang="en-US" noProof="0" dirty="0"/>
+              <a:t>No significant memory overhead</a:t>
+            </a:r>
+          </a:p>
+          <a:p>
+            <a:r>
+              <a:rPr lang="en-US" noProof="0" dirty="0"/>
+              <a:t>Extreme time overhead</a:t>
+            </a:r>
+          </a:p>
+          <a:p>
+            <a:r>
+              <a:rPr lang="en-US" noProof="0" dirty="0"/>
+              <a:t>Time </a:t>
+            </a:r>
+            <a:r>
+              <a:rPr lang="en-US" dirty="0"/>
+              <a:t>o</a:t>
+            </a:r>
+            <a:r>
+              <a:rPr lang="en-US" noProof="0" dirty="0" err="1"/>
+              <a:t>verhead</a:t>
+            </a:r>
+            <a:r>
+              <a:rPr lang="en-US" noProof="0" dirty="0"/>
+              <a:t> increased with </a:t>
+            </a:r>
+            <a:br>
+              <a:rPr lang="en-US" noProof="0" dirty="0"/>
+            </a:br>
+            <a:r>
+              <a:rPr lang="en-US" noProof="0" dirty="0"/>
+              <a:t>each „</a:t>
+            </a:r>
+            <a:r>
+              <a:rPr lang="en-US" noProof="0" dirty="0" err="1"/>
+              <a:t>PreCalculator</a:t>
+            </a:r>
+            <a:r>
+              <a:rPr lang="en-US" noProof="0" dirty="0"/>
+              <a:t>“ depth</a:t>
+            </a:r>
+          </a:p>
+          <a:p>
+            <a:pPr marL="0" indent="0">
+              <a:buNone/>
+            </a:pPr>
+            <a:endParaRPr lang="en-US" noProof="0" dirty="0"/>
+          </a:p>
+        </p:txBody>
+      </p:sp>
+      <p:sp>
+        <p:nvSpPr>
+          <p:cNvPr id="4" name="Fußzeilenplatzhalter 3">
+            <a:extLst>
+              <a:ext uri="{FF2B5EF4-FFF2-40B4-BE49-F238E27FC236}">
+                <a16:creationId xmlns:a16="http://schemas.microsoft.com/office/drawing/2014/main" id="{239E5EA8-6EF6-E6F2-803C-A59E9B7B5F3E}"/>
+              </a:ext>
+            </a:extLst>
+          </p:cNvPr>
+          <p:cNvSpPr>
+            <a:spLocks noGrp="1"/>
+          </p:cNvSpPr>
+          <p:nvPr>
+            <p:ph type="ftr" sz="quarter" idx="12"/>
+          </p:nvPr>
+        </p:nvSpPr>
+        <p:spPr/>
+        <p:txBody>
+          <a:bodyPr/>
+          <a:lstStyle/>
+          <a:p>
+            <a:r>
+              <a:rPr lang="en-US" noProof="0" dirty="0"/>
+              <a:t>Root-State and Child-State Q-table Abstraction | Stefan Werner | 31.05.2026</a:t>
+            </a:r>
+          </a:p>
+        </p:txBody>
+      </p:sp>
+      <p:sp>
+        <p:nvSpPr>
+          <p:cNvPr id="5" name="Foliennummernplatzhalter 4">
+            <a:extLst>
+              <a:ext uri="{FF2B5EF4-FFF2-40B4-BE49-F238E27FC236}">
+                <a16:creationId xmlns:a16="http://schemas.microsoft.com/office/drawing/2014/main" id="{A5E878D4-C22F-5375-5D54-D04B821808DD}"/>
+              </a:ext>
+            </a:extLst>
+          </p:cNvPr>
+          <p:cNvSpPr>
+            <a:spLocks noGrp="1"/>
+          </p:cNvSpPr>
+          <p:nvPr>
+            <p:ph type="sldNum" sz="quarter" idx="13"/>
+          </p:nvPr>
+        </p:nvSpPr>
+        <p:spPr/>
+        <p:txBody>
+          <a:bodyPr/>
+          <a:lstStyle/>
+          <a:p>
+            <a:fld id="{9C057DB4-583E-41A7-BD94-987342018C17}" type="slidenum">
+              <a:rPr lang="en-US" noProof="0" smtClean="0"/>
+              <a:pPr/>
+              <a:t>11</a:t>
+            </a:fld>
+            <a:endParaRPr lang="en-US" noProof="0" dirty="0"/>
+          </a:p>
+        </p:txBody>
+      </p:sp>
+      <p:graphicFrame>
+        <p:nvGraphicFramePr>
+          <p:cNvPr id="6" name="Diagramm 5">
+            <a:extLst>
+              <a:ext uri="{FF2B5EF4-FFF2-40B4-BE49-F238E27FC236}">
+                <a16:creationId xmlns:a16="http://schemas.microsoft.com/office/drawing/2014/main" id="{89504AE7-3541-A10C-FC2A-8AA120559F41}"/>
+              </a:ext>
+            </a:extLst>
+          </p:cNvPr>
+          <p:cNvGraphicFramePr/>
+          <p:nvPr>
+            <p:extLst>
+              <p:ext uri="{D42A27DB-BD31-4B8C-83A1-F6EECF244321}">
+                <p14:modId xmlns:p14="http://schemas.microsoft.com/office/powerpoint/2010/main" val="3858840502"/>
               </p:ext>
             </p:extLst>
           </p:nvPr>
@@ -8351,7 +8578,7 @@
           <p:nvPr>
             <p:extLst>
               <p:ext uri="{D42A27DB-BD31-4B8C-83A1-F6EECF244321}">
-                <p14:modId xmlns:p14="http://schemas.microsoft.com/office/powerpoint/2010/main" val="2380515161"/>
+                <p14:modId xmlns:p14="http://schemas.microsoft.com/office/powerpoint/2010/main" val="3607282557"/>
               </p:ext>
             </p:extLst>
           </p:nvPr>
@@ -9217,150 +9444,6 @@
 </p:sld>
 </file>
 
-<file path=ppt/slides/slide11.xml><?xml version="1.0" encoding="utf-8"?>
-<p:sld xmlns:a="http://schemas.openxmlformats.org/drawingml/2006/main" xmlns:r="http://schemas.openxmlformats.org/officeDocument/2006/relationships" xmlns:p="http://schemas.openxmlformats.org/presentationml/2006/main">
-  <p:cSld>
-    <p:spTree>
-      <p:nvGrpSpPr>
-        <p:cNvPr id="1" name=""/>
-        <p:cNvGrpSpPr/>
-        <p:nvPr/>
-      </p:nvGrpSpPr>
-      <p:grpSpPr>
-        <a:xfrm>
-          <a:off x="0" y="0"/>
-          <a:ext cx="0" cy="0"/>
-          <a:chOff x="0" y="0"/>
-          <a:chExt cx="0" cy="0"/>
-        </a:xfrm>
-      </p:grpSpPr>
-      <p:sp>
-        <p:nvSpPr>
-          <p:cNvPr id="2" name="Titel 1">
-            <a:extLst>
-              <a:ext uri="{FF2B5EF4-FFF2-40B4-BE49-F238E27FC236}">
-                <a16:creationId xmlns:a16="http://schemas.microsoft.com/office/drawing/2014/main" id="{905649AA-69A6-DF09-78A8-2016B387285C}"/>
-              </a:ext>
-            </a:extLst>
-          </p:cNvPr>
-          <p:cNvSpPr>
-            <a:spLocks noGrp="1"/>
-          </p:cNvSpPr>
-          <p:nvPr>
-            <p:ph type="title"/>
-          </p:nvPr>
-        </p:nvSpPr>
-        <p:spPr/>
-        <p:txBody>
-          <a:bodyPr>
-            <a:normAutofit fontScale="90000"/>
-          </a:bodyPr>
-          <a:lstStyle/>
-          <a:p>
-            <a:r>
-              <a:rPr lang="de-DE" dirty="0"/>
-              <a:t>Challenges</a:t>
-            </a:r>
-          </a:p>
-        </p:txBody>
-      </p:sp>
-      <p:sp>
-        <p:nvSpPr>
-          <p:cNvPr id="3" name="Textplatzhalter 2">
-            <a:extLst>
-              <a:ext uri="{FF2B5EF4-FFF2-40B4-BE49-F238E27FC236}">
-                <a16:creationId xmlns:a16="http://schemas.microsoft.com/office/drawing/2014/main" id="{98C2FE42-2880-A5C2-C8EA-131CA7373C8C}"/>
-              </a:ext>
-            </a:extLst>
-          </p:cNvPr>
-          <p:cNvSpPr>
-            <a:spLocks noGrp="1"/>
-          </p:cNvSpPr>
-          <p:nvPr>
-            <p:ph type="body" sz="quarter" idx="14"/>
-          </p:nvPr>
-        </p:nvSpPr>
-        <p:spPr/>
-        <p:txBody>
-          <a:bodyPr/>
-          <a:lstStyle/>
-          <a:p>
-            <a:endParaRPr lang="de-DE"/>
-          </a:p>
-        </p:txBody>
-      </p:sp>
-      <p:sp>
-        <p:nvSpPr>
-          <p:cNvPr id="4" name="Fußzeilenplatzhalter 3">
-            <a:extLst>
-              <a:ext uri="{FF2B5EF4-FFF2-40B4-BE49-F238E27FC236}">
-                <a16:creationId xmlns:a16="http://schemas.microsoft.com/office/drawing/2014/main" id="{62E94B2F-AC21-DD07-A546-5818E369DBCB}"/>
-              </a:ext>
-            </a:extLst>
-          </p:cNvPr>
-          <p:cNvSpPr>
-            <a:spLocks noGrp="1"/>
-          </p:cNvSpPr>
-          <p:nvPr>
-            <p:ph type="ftr" sz="quarter" idx="12"/>
-          </p:nvPr>
-        </p:nvSpPr>
-        <p:spPr/>
-        <p:txBody>
-          <a:bodyPr/>
-          <a:lstStyle/>
-          <a:p>
-            <a:r>
-              <a:rPr lang="en-US"/>
-              <a:t>Root-State and Child-State Q-table Abstraction | Stefan Werner | 31.05.2026</a:t>
-            </a:r>
-            <a:endParaRPr lang="en-GB" dirty="0"/>
-          </a:p>
-        </p:txBody>
-      </p:sp>
-      <p:sp>
-        <p:nvSpPr>
-          <p:cNvPr id="5" name="Foliennummernplatzhalter 4">
-            <a:extLst>
-              <a:ext uri="{FF2B5EF4-FFF2-40B4-BE49-F238E27FC236}">
-                <a16:creationId xmlns:a16="http://schemas.microsoft.com/office/drawing/2014/main" id="{345D3737-6DFF-01FC-450C-79960D5EA711}"/>
-              </a:ext>
-            </a:extLst>
-          </p:cNvPr>
-          <p:cNvSpPr>
-            <a:spLocks noGrp="1"/>
-          </p:cNvSpPr>
-          <p:nvPr>
-            <p:ph type="sldNum" sz="quarter" idx="13"/>
-          </p:nvPr>
-        </p:nvSpPr>
-        <p:spPr/>
-        <p:txBody>
-          <a:bodyPr/>
-          <a:lstStyle/>
-          <a:p>
-            <a:fld id="{9C057DB4-583E-41A7-BD94-987342018C17}" type="slidenum">
-              <a:rPr lang="en-GB" smtClean="0"/>
-              <a:pPr/>
-              <a:t>11</a:t>
-            </a:fld>
-            <a:endParaRPr lang="en-GB" dirty="0"/>
-          </a:p>
-        </p:txBody>
-      </p:sp>
-    </p:spTree>
-    <p:extLst>
-      <p:ext uri="{BB962C8B-B14F-4D97-AF65-F5344CB8AC3E}">
-        <p14:creationId xmlns:p14="http://schemas.microsoft.com/office/powerpoint/2010/main" val="1085731577"/>
-      </p:ext>
-    </p:extLst>
-  </p:cSld>
-  <p:clrMapOvr>
-    <a:masterClrMapping/>
-  </p:clrMapOvr>
-</p:sld>
-</file>
-
 <file path=ppt/slides/slide12.xml><?xml version="1.0" encoding="utf-8"?>
 <p:sld xmlns:a="http://schemas.openxmlformats.org/drawingml/2006/main" xmlns:r="http://schemas.openxmlformats.org/officeDocument/2006/relationships" xmlns:p="http://schemas.openxmlformats.org/presentationml/2006/main">
   <p:cSld>
@@ -9437,6 +9520,13 @@
           <a:p>
             <a:r>
               <a:rPr lang="en-US" dirty="0"/>
+              <a:t>Game performance nearly identical with reduction in storage space of 56% percent</a:t>
+            </a:r>
+            <a:endParaRPr lang="en-US" noProof="0" dirty="0"/>
+          </a:p>
+          <a:p>
+            <a:r>
+              <a:rPr lang="en-US" noProof="0" dirty="0"/>
               <a:t>Not practical due to time overhead</a:t>
             </a:r>
           </a:p>
@@ -9448,11 +9538,15 @@
           </a:p>
           <a:p>
             <a:r>
+              <a:rPr lang="en-US" noProof="0" dirty="0"/>
+              <a:t>4x4 is to large given the current operation set</a:t>
+            </a:r>
+          </a:p>
+          <a:p>
+            <a:r>
               <a:rPr lang="en-US" dirty="0"/>
-              <a:t>4x4 is to large given the current operation set</a:t>
-            </a:r>
-          </a:p>
-          <a:p>
+              <a:t>Action values of parent inevitably leads to loss of information</a:t>
+            </a:r>
             <a:endParaRPr lang="en-US" noProof="0" dirty="0"/>
           </a:p>
         </p:txBody>
@@ -9550,7 +9644,7 @@
           <p:cNvPr id="2" name="Titel 1">
             <a:extLst>
               <a:ext uri="{FF2B5EF4-FFF2-40B4-BE49-F238E27FC236}">
-                <a16:creationId xmlns:a16="http://schemas.microsoft.com/office/drawing/2014/main" id="{72ED1802-CEF5-1621-6D78-39C97A0BDEAA}"/>
+                <a16:creationId xmlns:a16="http://schemas.microsoft.com/office/drawing/2014/main" id="{905649AA-69A6-DF09-78A8-2016B387285C}"/>
               </a:ext>
             </a:extLst>
           </p:cNvPr>
@@ -9569,10 +9663,9 @@
           <a:lstStyle/>
           <a:p>
             <a:r>
-              <a:rPr lang="de-DE" dirty="0" err="1"/>
-              <a:t>Outloock</a:t>
-            </a:r>
-            <a:endParaRPr lang="de-DE" dirty="0"/>
+              <a:rPr lang="en-US" noProof="0" dirty="0"/>
+              <a:t>Challenges</a:t>
+            </a:r>
           </a:p>
         </p:txBody>
       </p:sp>
@@ -9581,7 +9674,7 @@
           <p:cNvPr id="3" name="Textplatzhalter 2">
             <a:extLst>
               <a:ext uri="{FF2B5EF4-FFF2-40B4-BE49-F238E27FC236}">
-                <a16:creationId xmlns:a16="http://schemas.microsoft.com/office/drawing/2014/main" id="{50FB04C0-604C-1513-A195-4BD0F808A405}"/>
+                <a16:creationId xmlns:a16="http://schemas.microsoft.com/office/drawing/2014/main" id="{98C2FE42-2880-A5C2-C8EA-131CA7373C8C}"/>
               </a:ext>
             </a:extLst>
           </p:cNvPr>
@@ -9597,7 +9690,34 @@
           <a:bodyPr/>
           <a:lstStyle/>
           <a:p>
-            <a:endParaRPr lang="de-DE"/>
+            <a:r>
+              <a:rPr lang="en-US" noProof="0" dirty="0"/>
+              <a:t>Extremely long waiting time for 4x4 environment</a:t>
+            </a:r>
+          </a:p>
+          <a:p>
+            <a:r>
+              <a:rPr lang="en-US" dirty="0"/>
+              <a:t>Splitting algorithm</a:t>
+            </a:r>
+          </a:p>
+          <a:p>
+            <a:r>
+              <a:rPr lang="en-US" noProof="0" dirty="0"/>
+              <a:t>Better operations</a:t>
+            </a:r>
+          </a:p>
+          <a:p>
+            <a:r>
+              <a:rPr lang="en-US" noProof="0" dirty="0"/>
+              <a:t>Policy agreement</a:t>
+            </a:r>
+          </a:p>
+          <a:p>
+            <a:r>
+              <a:rPr lang="en-US" noProof="0" dirty="0"/>
+              <a:t>Training on 2 tables instead of 1</a:t>
+            </a:r>
           </a:p>
         </p:txBody>
       </p:sp>
@@ -9606,7 +9726,7 @@
           <p:cNvPr id="4" name="Fußzeilenplatzhalter 3">
             <a:extLst>
               <a:ext uri="{FF2B5EF4-FFF2-40B4-BE49-F238E27FC236}">
-                <a16:creationId xmlns:a16="http://schemas.microsoft.com/office/drawing/2014/main" id="{7E0C6322-A887-B15B-2E90-CA38AFD96FAB}"/>
+                <a16:creationId xmlns:a16="http://schemas.microsoft.com/office/drawing/2014/main" id="{62E94B2F-AC21-DD07-A546-5818E369DBCB}"/>
               </a:ext>
             </a:extLst>
           </p:cNvPr>
@@ -9623,10 +9743,9 @@
           <a:lstStyle/>
           <a:p>
             <a:r>
-              <a:rPr lang="en-US"/>
+              <a:rPr lang="en-US" noProof="0" dirty="0"/>
               <a:t>Root-State and Child-State Q-table Abstraction | Stefan Werner | 31.05.2026</a:t>
             </a:r>
-            <a:endParaRPr lang="en-GB" dirty="0"/>
           </a:p>
         </p:txBody>
       </p:sp>
@@ -9635,7 +9754,7 @@
           <p:cNvPr id="5" name="Foliennummernplatzhalter 4">
             <a:extLst>
               <a:ext uri="{FF2B5EF4-FFF2-40B4-BE49-F238E27FC236}">
-                <a16:creationId xmlns:a16="http://schemas.microsoft.com/office/drawing/2014/main" id="{2D174200-C0EA-AFFA-4270-431F670E3A55}"/>
+                <a16:creationId xmlns:a16="http://schemas.microsoft.com/office/drawing/2014/main" id="{345D3737-6DFF-01FC-450C-79960D5EA711}"/>
               </a:ext>
             </a:extLst>
           </p:cNvPr>
@@ -9652,11 +9771,209 @@
           <a:lstStyle/>
           <a:p>
             <a:fld id="{9C057DB4-583E-41A7-BD94-987342018C17}" type="slidenum">
-              <a:rPr lang="en-GB" smtClean="0"/>
+              <a:rPr lang="en-US" noProof="0" smtClean="0"/>
               <a:pPr/>
               <a:t>13</a:t>
             </a:fld>
-            <a:endParaRPr lang="en-GB" dirty="0"/>
+            <a:endParaRPr lang="en-US" noProof="0" dirty="0"/>
+          </a:p>
+        </p:txBody>
+      </p:sp>
+    </p:spTree>
+    <p:extLst>
+      <p:ext uri="{BB962C8B-B14F-4D97-AF65-F5344CB8AC3E}">
+        <p14:creationId xmlns:p14="http://schemas.microsoft.com/office/powerpoint/2010/main" val="1085731577"/>
+      </p:ext>
+    </p:extLst>
+  </p:cSld>
+  <p:clrMapOvr>
+    <a:masterClrMapping/>
+  </p:clrMapOvr>
+</p:sld>
+</file>
+
+<file path=ppt/slides/slide14.xml><?xml version="1.0" encoding="utf-8"?>
+<p:sld xmlns:a="http://schemas.openxmlformats.org/drawingml/2006/main" xmlns:r="http://schemas.openxmlformats.org/officeDocument/2006/relationships" xmlns:p="http://schemas.openxmlformats.org/presentationml/2006/main">
+  <p:cSld>
+    <p:spTree>
+      <p:nvGrpSpPr>
+        <p:cNvPr id="1" name=""/>
+        <p:cNvGrpSpPr/>
+        <p:nvPr/>
+      </p:nvGrpSpPr>
+      <p:grpSpPr>
+        <a:xfrm>
+          <a:off x="0" y="0"/>
+          <a:ext cx="0" cy="0"/>
+          <a:chOff x="0" y="0"/>
+          <a:chExt cx="0" cy="0"/>
+        </a:xfrm>
+      </p:grpSpPr>
+      <p:sp>
+        <p:nvSpPr>
+          <p:cNvPr id="2" name="Titel 1">
+            <a:extLst>
+              <a:ext uri="{FF2B5EF4-FFF2-40B4-BE49-F238E27FC236}">
+                <a16:creationId xmlns:a16="http://schemas.microsoft.com/office/drawing/2014/main" id="{72ED1802-CEF5-1621-6D78-39C97A0BDEAA}"/>
+              </a:ext>
+            </a:extLst>
+          </p:cNvPr>
+          <p:cNvSpPr>
+            <a:spLocks noGrp="1"/>
+          </p:cNvSpPr>
+          <p:nvPr>
+            <p:ph type="title"/>
+          </p:nvPr>
+        </p:nvSpPr>
+        <p:spPr/>
+        <p:txBody>
+          <a:bodyPr>
+            <a:normAutofit fontScale="90000"/>
+          </a:bodyPr>
+          <a:lstStyle/>
+          <a:p>
+            <a:r>
+              <a:rPr lang="en-US" noProof="0" dirty="0"/>
+              <a:t>Outlook</a:t>
+            </a:r>
+          </a:p>
+        </p:txBody>
+      </p:sp>
+      <p:sp>
+        <p:nvSpPr>
+          <p:cNvPr id="3" name="Textplatzhalter 2">
+            <a:extLst>
+              <a:ext uri="{FF2B5EF4-FFF2-40B4-BE49-F238E27FC236}">
+                <a16:creationId xmlns:a16="http://schemas.microsoft.com/office/drawing/2014/main" id="{50FB04C0-604C-1513-A195-4BD0F808A405}"/>
+              </a:ext>
+            </a:extLst>
+          </p:cNvPr>
+          <p:cNvSpPr>
+            <a:spLocks noGrp="1"/>
+          </p:cNvSpPr>
+          <p:nvPr>
+            <p:ph type="body" sz="quarter" idx="14"/>
+          </p:nvPr>
+        </p:nvSpPr>
+        <p:spPr/>
+        <p:txBody>
+          <a:bodyPr/>
+          <a:lstStyle/>
+          <a:p>
+            <a:r>
+              <a:rPr lang="en-US" noProof="0" dirty="0"/>
+              <a:t>Optimization of the splitting algorithm</a:t>
+            </a:r>
+          </a:p>
+          <a:p>
+            <a:r>
+              <a:rPr lang="en-US" dirty="0"/>
+              <a:t>Intelligent parent state selection</a:t>
+            </a:r>
+          </a:p>
+          <a:p>
+            <a:r>
+              <a:rPr lang="en-US" noProof="0" dirty="0"/>
+              <a:t>Adaptive searching</a:t>
+            </a:r>
+          </a:p>
+          <a:p>
+            <a:r>
+              <a:rPr lang="en-US" dirty="0"/>
+              <a:t>Adaptive “</a:t>
+            </a:r>
+            <a:r>
+              <a:rPr lang="en-US" dirty="0" err="1"/>
+              <a:t>PreCalculator</a:t>
+            </a:r>
+            <a:r>
+              <a:rPr lang="en-US" dirty="0"/>
+              <a:t>” depth search</a:t>
+            </a:r>
+          </a:p>
+          <a:p>
+            <a:r>
+              <a:rPr lang="en-US" noProof="0" dirty="0"/>
+              <a:t>Increased storage reduction</a:t>
+            </a:r>
+          </a:p>
+          <a:p>
+            <a:r>
+              <a:rPr lang="en-US" dirty="0"/>
+              <a:t>Reduction in Loss of information</a:t>
+            </a:r>
+          </a:p>
+          <a:p>
+            <a:r>
+              <a:rPr lang="en-US" dirty="0"/>
+              <a:t>Operation Concepts such as:</a:t>
+            </a:r>
+          </a:p>
+          <a:p>
+            <a:pPr lvl="1"/>
+            <a:r>
+              <a:rPr lang="en-US" dirty="0"/>
+              <a:t>Edge expansion, Triangle detection, chunk detection</a:t>
+            </a:r>
+            <a:endParaRPr lang="en-US" noProof="0" dirty="0"/>
+          </a:p>
+        </p:txBody>
+      </p:sp>
+      <p:sp>
+        <p:nvSpPr>
+          <p:cNvPr id="4" name="Fußzeilenplatzhalter 3">
+            <a:extLst>
+              <a:ext uri="{FF2B5EF4-FFF2-40B4-BE49-F238E27FC236}">
+                <a16:creationId xmlns:a16="http://schemas.microsoft.com/office/drawing/2014/main" id="{7E0C6322-A887-B15B-2E90-CA38AFD96FAB}"/>
+              </a:ext>
+            </a:extLst>
+          </p:cNvPr>
+          <p:cNvSpPr>
+            <a:spLocks noGrp="1"/>
+          </p:cNvSpPr>
+          <p:nvPr>
+            <p:ph type="ftr" sz="quarter" idx="12"/>
+          </p:nvPr>
+        </p:nvSpPr>
+        <p:spPr/>
+        <p:txBody>
+          <a:bodyPr/>
+          <a:lstStyle/>
+          <a:p>
+            <a:r>
+              <a:rPr lang="en-US" noProof="0" dirty="0"/>
+              <a:t>Root-State and Child-State Q-table Abstraction | Stefan Werner | 31.05.2026</a:t>
+            </a:r>
+          </a:p>
+        </p:txBody>
+      </p:sp>
+      <p:sp>
+        <p:nvSpPr>
+          <p:cNvPr id="5" name="Foliennummernplatzhalter 4">
+            <a:extLst>
+              <a:ext uri="{FF2B5EF4-FFF2-40B4-BE49-F238E27FC236}">
+                <a16:creationId xmlns:a16="http://schemas.microsoft.com/office/drawing/2014/main" id="{2D174200-C0EA-AFFA-4270-431F670E3A55}"/>
+              </a:ext>
+            </a:extLst>
+          </p:cNvPr>
+          <p:cNvSpPr>
+            <a:spLocks noGrp="1"/>
+          </p:cNvSpPr>
+          <p:nvPr>
+            <p:ph type="sldNum" sz="quarter" idx="13"/>
+          </p:nvPr>
+        </p:nvSpPr>
+        <p:spPr/>
+        <p:txBody>
+          <a:bodyPr/>
+          <a:lstStyle/>
+          <a:p>
+            <a:fld id="{9C057DB4-583E-41A7-BD94-987342018C17}" type="slidenum">
+              <a:rPr lang="en-US" noProof="0" smtClean="0"/>
+              <a:pPr/>
+              <a:t>14</a:t>
+            </a:fld>
+            <a:endParaRPr lang="en-US" noProof="0" dirty="0"/>
           </a:p>
         </p:txBody>
       </p:sp>
@@ -9761,15 +10078,7 @@
           <a:p>
             <a:r>
               <a:rPr lang="en-US" noProof="0" dirty="0"/>
-              <a:t>Many </a:t>
-            </a:r>
-            <a:r>
-              <a:rPr lang="en-US" noProof="0" dirty="0" err="1"/>
-              <a:t>structuraly</a:t>
-            </a:r>
-            <a:r>
-              <a:rPr lang="en-US" noProof="0" dirty="0"/>
-              <a:t> similar states</a:t>
+              <a:t>Many structurally similar states</a:t>
             </a:r>
           </a:p>
         </p:txBody>
@@ -9870,7 +10179,7 @@
         </p:blipFill>
         <p:spPr>
           <a:xfrm>
-            <a:off x="2395960" y="2713550"/>
+            <a:off x="2395960" y="2632500"/>
             <a:ext cx="4343400" cy="1822450"/>
           </a:xfrm>
           <a:prstGeom prst="rect">
@@ -10181,8 +10490,51 @@
           <a:p>
             <a:r>
               <a:rPr lang="en-US" noProof="0" dirty="0"/>
-              <a:t>Testing environments: 2x2, 3x3, 4x4</a:t>
-            </a:r>
+              <a:t>Testing environments: </a:t>
+            </a:r>
+            <a:br>
+              <a:rPr lang="en-US" noProof="0" dirty="0"/>
+            </a:br>
+            <a:r>
+              <a:rPr lang="en-US" noProof="0" dirty="0"/>
+              <a:t>2x2, 3x3, 4x4</a:t>
+            </a:r>
+          </a:p>
+          <a:p>
+            <a:r>
+              <a:rPr lang="en-US" noProof="0" dirty="0"/>
+              <a:t>Save original Q-table</a:t>
+            </a:r>
+            <a:br>
+              <a:rPr lang="en-US" noProof="0" dirty="0"/>
+            </a:br>
+            <a:r>
+              <a:rPr lang="en-US" noProof="0" dirty="0"/>
+              <a:t>for comparison later</a:t>
+            </a:r>
+          </a:p>
+          <a:p>
+            <a:r>
+              <a:rPr lang="en-US" noProof="0" dirty="0"/>
+              <a:t>Reconstruction step </a:t>
+            </a:r>
+            <a:br>
+              <a:rPr lang="en-US" noProof="0" dirty="0"/>
+            </a:br>
+            <a:r>
+              <a:rPr lang="en-US" noProof="0" dirty="0"/>
+              <a:t>uses the same </a:t>
+            </a:r>
+            <a:br>
+              <a:rPr lang="en-US" noProof="0" dirty="0"/>
+            </a:br>
+            <a:r>
+              <a:rPr lang="en-US" noProof="0" dirty="0"/>
+              <a:t>methods as Splitting</a:t>
+            </a:r>
+          </a:p>
+          <a:p>
+            <a:endParaRPr lang="en-US" noProof="0" dirty="0"/>
           </a:p>
         </p:txBody>
       </p:sp>
@@ -10246,32 +10598,96 @@
       </p:sp>
       <p:pic>
         <p:nvPicPr>
-          <p:cNvPr id="9" name="Grafik 8">
+          <p:cNvPr id="1030" name="Picture 6">
             <a:extLst>
               <a:ext uri="{FF2B5EF4-FFF2-40B4-BE49-F238E27FC236}">
-                <a16:creationId xmlns:a16="http://schemas.microsoft.com/office/drawing/2014/main" id="{311D4DA4-755C-AA32-24E0-9AED5F72E30B}"/>
+                <a16:creationId xmlns:a16="http://schemas.microsoft.com/office/drawing/2014/main" id="{8870B293-434F-F680-B679-D8471DD8E279}"/>
               </a:ext>
             </a:extLst>
           </p:cNvPr>
           <p:cNvPicPr>
-            <a:picLocks noChangeAspect="1"/>
+            <a:picLocks noChangeAspect="1" noChangeArrowheads="1"/>
           </p:cNvPicPr>
           <p:nvPr/>
         </p:nvPicPr>
         <p:blipFill>
-          <a:blip r:embed="rId2"/>
+          <a:blip r:embed="rId2" cstate="print">
+            <a:extLst>
+              <a:ext uri="{28A0092B-C50C-407E-A947-70E740481C1C}">
+                <a14:useLocalDpi xmlns:a14="http://schemas.microsoft.com/office/drawing/2010/main" val="0"/>
+              </a:ext>
+            </a:extLst>
+          </a:blip>
+          <a:srcRect/>
           <a:stretch>
             <a:fillRect/>
           </a:stretch>
         </p:blipFill>
-        <p:spPr>
+        <p:spPr bwMode="auto">
           <a:xfrm>
-            <a:off x="179999" y="1738652"/>
-            <a:ext cx="8775321" cy="2074167"/>
+            <a:off x="3137178" y="57152"/>
+            <a:ext cx="5726702" cy="2757301"/>
           </a:xfrm>
           <a:prstGeom prst="rect">
             <a:avLst/>
           </a:prstGeom>
+          <a:noFill/>
+          <a:extLst>
+            <a:ext uri="{909E8E84-426E-40DD-AFC4-6F175D3DCCD1}">
+              <a14:hiddenFill xmlns:a14="http://schemas.microsoft.com/office/drawing/2010/main">
+                <a:solidFill>
+                  <a:srgbClr val="FFFFFF"/>
+                </a:solidFill>
+              </a14:hiddenFill>
+            </a:ext>
+          </a:extLst>
+        </p:spPr>
+      </p:pic>
+      <p:pic>
+        <p:nvPicPr>
+          <p:cNvPr id="1032" name="Picture 8">
+            <a:extLst>
+              <a:ext uri="{FF2B5EF4-FFF2-40B4-BE49-F238E27FC236}">
+                <a16:creationId xmlns:a16="http://schemas.microsoft.com/office/drawing/2014/main" id="{316D5EB1-72D4-7B4C-7B06-52B8ACEDDDF3}"/>
+              </a:ext>
+            </a:extLst>
+          </p:cNvPr>
+          <p:cNvPicPr>
+            <a:picLocks noChangeAspect="1" noChangeArrowheads="1"/>
+          </p:cNvPicPr>
+          <p:nvPr/>
+        </p:nvPicPr>
+        <p:blipFill>
+          <a:blip r:embed="rId3" cstate="print">
+            <a:extLst>
+              <a:ext uri="{28A0092B-C50C-407E-A947-70E740481C1C}">
+                <a14:useLocalDpi xmlns:a14="http://schemas.microsoft.com/office/drawing/2010/main" val="0"/>
+              </a:ext>
+            </a:extLst>
+          </a:blip>
+          <a:srcRect/>
+          <a:stretch>
+            <a:fillRect/>
+          </a:stretch>
+        </p:blipFill>
+        <p:spPr bwMode="auto">
+          <a:xfrm>
+            <a:off x="3468253" y="2740118"/>
+            <a:ext cx="4903469" cy="1917382"/>
+          </a:xfrm>
+          <a:prstGeom prst="rect">
+            <a:avLst/>
+          </a:prstGeom>
+          <a:noFill/>
+          <a:extLst>
+            <a:ext uri="{909E8E84-426E-40DD-AFC4-6F175D3DCCD1}">
+              <a14:hiddenFill xmlns:a14="http://schemas.microsoft.com/office/drawing/2010/main">
+                <a:solidFill>
+                  <a:srgbClr val="FFFFFF"/>
+                </a:solidFill>
+              </a14:hiddenFill>
+            </a:ext>
+          </a:extLst>
         </p:spPr>
       </p:pic>
     </p:spTree>
@@ -10332,7 +10748,7 @@
         </p:blipFill>
         <p:spPr>
           <a:xfrm>
-            <a:off x="1719046" y="1796374"/>
+            <a:off x="1859280" y="1674874"/>
             <a:ext cx="5697227" cy="2861126"/>
           </a:xfrm>
           <a:prstGeom prst="rect">
@@ -10416,6 +10832,9 @@
               <a:t>All reached states temporarily saved</a:t>
             </a:r>
           </a:p>
+          <a:p>
+            <a:endParaRPr lang="en-US" noProof="0" dirty="0"/>
+          </a:p>
         </p:txBody>
       </p:sp>
       <p:sp>
@@ -10473,6 +10892,68 @@
               <a:t>5</a:t>
             </a:fld>
             <a:endParaRPr lang="en-US" noProof="0" dirty="0"/>
+          </a:p>
+        </p:txBody>
+      </p:sp>
+      <p:pic>
+        <p:nvPicPr>
+          <p:cNvPr id="7" name="Grafik 6">
+            <a:extLst>
+              <a:ext uri="{FF2B5EF4-FFF2-40B4-BE49-F238E27FC236}">
+                <a16:creationId xmlns:a16="http://schemas.microsoft.com/office/drawing/2014/main" id="{81E98618-D836-F61C-013E-7D5BCFD4CDD5}"/>
+              </a:ext>
+            </a:extLst>
+          </p:cNvPr>
+          <p:cNvPicPr>
+            <a:picLocks noChangeAspect="1"/>
+          </p:cNvPicPr>
+          <p:nvPr/>
+        </p:nvPicPr>
+        <p:blipFill>
+          <a:blip r:embed="rId3"/>
+          <a:stretch>
+            <a:fillRect/>
+          </a:stretch>
+        </p:blipFill>
+        <p:spPr>
+          <a:xfrm>
+            <a:off x="6198046" y="333879"/>
+            <a:ext cx="2438740" cy="1028844"/>
+          </a:xfrm>
+          <a:prstGeom prst="rect">
+            <a:avLst/>
+          </a:prstGeom>
+        </p:spPr>
+      </p:pic>
+      <p:sp>
+        <p:nvSpPr>
+          <p:cNvPr id="9" name="Textfeld 8">
+            <a:extLst>
+              <a:ext uri="{FF2B5EF4-FFF2-40B4-BE49-F238E27FC236}">
+                <a16:creationId xmlns:a16="http://schemas.microsoft.com/office/drawing/2014/main" id="{260054FC-53B3-C340-8093-699D5499F841}"/>
+              </a:ext>
+            </a:extLst>
+          </p:cNvPr>
+          <p:cNvSpPr txBox="1"/>
+          <p:nvPr/>
+        </p:nvSpPr>
+        <p:spPr>
+          <a:xfrm>
+            <a:off x="6370320" y="1455420"/>
+            <a:ext cx="914400" cy="914400"/>
+          </a:xfrm>
+          <a:prstGeom prst="rect">
+            <a:avLst/>
+          </a:prstGeom>
+        </p:spPr>
+        <p:txBody>
+          <a:bodyPr vert="horz" wrap="none" lIns="91440" tIns="45720" rIns="91440" bIns="45720" rtlCol="0" anchor="t">
+            <a:normAutofit/>
+          </a:bodyPr>
+          <a:lstStyle/>
+          <a:p>
+            <a:pPr algn="l"/>
+            <a:endParaRPr lang="en-US" sz="2800" noProof="0" dirty="0"/>
           </a:p>
         </p:txBody>
       </p:sp>
@@ -10755,997 +11236,68 @@
           </a:p>
         </p:txBody>
       </p:sp>
-      <mc:AlternateContent xmlns:mc="http://schemas.openxmlformats.org/markup-compatibility/2006" xmlns:a14="http://schemas.microsoft.com/office/drawing/2010/main">
-        <mc:Choice Requires="a14">
-          <p:sp>
-            <p:nvSpPr>
-              <p:cNvPr id="3" name="Textplatzhalter 2">
-                <a:extLst>
-                  <a:ext uri="{FF2B5EF4-FFF2-40B4-BE49-F238E27FC236}">
-                    <a16:creationId xmlns:a16="http://schemas.microsoft.com/office/drawing/2014/main" id="{E7C291CB-A98D-656F-62CA-EC5AE23D5B4F}"/>
-                  </a:ext>
-                </a:extLst>
-              </p:cNvPr>
-              <p:cNvSpPr>
-                <a:spLocks noGrp="1"/>
-              </p:cNvSpPr>
-              <p:nvPr>
-                <p:ph type="body" sz="quarter" idx="14"/>
-              </p:nvPr>
-            </p:nvSpPr>
-            <p:spPr/>
-            <p:txBody>
-              <a:bodyPr>
-                <a:normAutofit fontScale="92500" lnSpcReduction="10000"/>
-              </a:bodyPr>
-              <a:lstStyle/>
-              <a:p>
-                <a:r>
-                  <a:rPr lang="en-US" noProof="0" dirty="0"/>
-                  <a:t>Reconstruction done in reverse order</a:t>
-                </a:r>
-              </a:p>
-              <a:p>
-                <a:r>
-                  <a:rPr lang="en-US" noProof="0" dirty="0"/>
-                  <a:t>Reconstructed table formed out of parent and child table</a:t>
-                </a:r>
-              </a:p>
-              <a:p>
-                <a:r>
-                  <a:rPr lang="en-US" noProof="0" dirty="0"/>
-                  <a:t>If needed best direction is applied</a:t>
-                </a:r>
-              </a:p>
-              <a:p>
-                <a:r>
-                  <a:rPr lang="en-US" noProof="0" dirty="0"/>
-                  <a:t>Evaluation metrics: </a:t>
-                </a:r>
-              </a:p>
-              <a:p>
-                <a:pPr lvl="1"/>
-                <a14:m>
-                  <m:oMath xmlns:m="http://schemas.openxmlformats.org/officeDocument/2006/math">
-                    <m:sSub>
-                      <m:sSubPr>
-                        <m:ctrlPr>
-                          <a:rPr lang="en-US" sz="1500" i="1" noProof="0" smtClean="0">
-                            <a:latin typeface="Cambria Math" panose="02040503050406030204" pitchFamily="18" charset="0"/>
-                          </a:rPr>
-                        </m:ctrlPr>
-                      </m:sSubPr>
-                      <m:e>
-                        <m:r>
-                          <a:rPr lang="en-US" sz="1500" i="1" noProof="0" smtClean="0">
-                            <a:latin typeface="Cambria Math" panose="02040503050406030204" pitchFamily="18" charset="0"/>
-                          </a:rPr>
-                          <m:t>𝑀</m:t>
-                        </m:r>
-                      </m:e>
-                      <m:sub>
-                        <m:r>
-                          <a:rPr lang="en-US" sz="1500" i="1" noProof="0" smtClean="0">
-                            <a:latin typeface="Cambria Math" panose="02040503050406030204" pitchFamily="18" charset="0"/>
-                          </a:rPr>
-                          <m:t>𝑟𝑒𝑑𝑢𝑐𝑡𝑖𝑜𝑛</m:t>
-                        </m:r>
-                      </m:sub>
-                    </m:sSub>
-                  </m:oMath>
-                </a14:m>
-                <a:r>
-                  <a:rPr lang="en-US" sz="1500" noProof="0" dirty="0"/>
-                  <a:t>		</a:t>
-                </a:r>
-                <a14:m>
-                  <m:oMath xmlns:m="http://schemas.openxmlformats.org/officeDocument/2006/math">
-                    <m:r>
-                      <a:rPr lang="en-US" sz="1500" i="1" noProof="0" smtClean="0">
-                        <a:latin typeface="Cambria Math" panose="02040503050406030204" pitchFamily="18" charset="0"/>
-                      </a:rPr>
-                      <m:t>𝑆𝑡𝑜𝑟𝑎𝑔𝑒</m:t>
-                    </m:r>
-                    <m:r>
-                      <a:rPr lang="en-US" sz="1500" i="1" noProof="0" smtClean="0">
-                        <a:latin typeface="Cambria Math" panose="02040503050406030204" pitchFamily="18" charset="0"/>
-                      </a:rPr>
-                      <m:t> </m:t>
-                    </m:r>
-                    <m:r>
-                      <a:rPr lang="en-US" sz="1500" i="1" noProof="0" smtClean="0">
-                        <a:latin typeface="Cambria Math" panose="02040503050406030204" pitchFamily="18" charset="0"/>
-                      </a:rPr>
-                      <m:t>𝑟𝑒𝑑𝑢𝑐𝑡𝑖𝑜𝑛</m:t>
-                    </m:r>
-                  </m:oMath>
-                </a14:m>
-                <a:r>
-                  <a:rPr lang="en-US" sz="1500" noProof="0" dirty="0"/>
-                  <a:t>		</a:t>
-                </a:r>
-                <a14:m>
-                  <m:oMath xmlns:m="http://schemas.openxmlformats.org/officeDocument/2006/math">
-                    <m:r>
-                      <a:rPr lang="en-US" sz="1500" b="0" i="0" noProof="0" smtClean="0">
-                        <a:latin typeface="Cambria Math" panose="02040503050406030204" pitchFamily="18" charset="0"/>
-                      </a:rPr>
-                      <m:t>=</m:t>
-                    </m:r>
-                    <m:r>
-                      <a:rPr lang="en-US" sz="1500" b="0" i="1" noProof="0" smtClean="0">
-                        <a:latin typeface="Cambria Math" panose="02040503050406030204" pitchFamily="18" charset="0"/>
-                      </a:rPr>
-                      <m:t>1 −</m:t>
-                    </m:r>
-                    <m:f>
-                      <m:fPr>
-                        <m:ctrlPr>
-                          <a:rPr lang="en-US" sz="1500" b="0" i="1" noProof="0" smtClean="0">
-                            <a:latin typeface="Cambria Math" panose="02040503050406030204" pitchFamily="18" charset="0"/>
-                          </a:rPr>
-                        </m:ctrlPr>
-                      </m:fPr>
-                      <m:num>
-                        <m:sSup>
-                          <m:sSupPr>
-                            <m:ctrlPr>
-                              <a:rPr lang="en-US" sz="1500" b="0" i="1" noProof="0" smtClean="0">
-                                <a:latin typeface="Cambria Math" panose="02040503050406030204" pitchFamily="18" charset="0"/>
-                              </a:rPr>
-                            </m:ctrlPr>
-                          </m:sSupPr>
-                          <m:e>
-                            <m:r>
-                              <a:rPr lang="en-US" sz="1500" b="0" i="1" noProof="0" smtClean="0">
-                                <a:latin typeface="Cambria Math" panose="02040503050406030204" pitchFamily="18" charset="0"/>
-                              </a:rPr>
-                              <m:t>𝑀</m:t>
-                            </m:r>
-                          </m:e>
-                          <m:sup>
-                            <m:r>
-                              <a:rPr lang="en-US" sz="1500" b="0" i="1" noProof="0" smtClean="0">
-                                <a:latin typeface="Cambria Math" panose="02040503050406030204" pitchFamily="18" charset="0"/>
-                              </a:rPr>
-                              <m:t>′</m:t>
-                            </m:r>
-                          </m:sup>
-                        </m:sSup>
-                      </m:num>
-                      <m:den>
-                        <m:r>
-                          <a:rPr lang="en-US" sz="1500" b="0" i="1" noProof="0" smtClean="0">
-                            <a:latin typeface="Cambria Math" panose="02040503050406030204" pitchFamily="18" charset="0"/>
-                          </a:rPr>
-                          <m:t>𝑀</m:t>
-                        </m:r>
-                      </m:den>
-                    </m:f>
-                  </m:oMath>
-                </a14:m>
-                <a:endParaRPr lang="en-US" sz="1500" noProof="0" dirty="0"/>
-              </a:p>
-              <a:p>
-                <a:pPr lvl="1"/>
-                <a14:m>
-                  <m:oMath xmlns:m="http://schemas.openxmlformats.org/officeDocument/2006/math">
-                    <m:sSubSup>
-                      <m:sSubSupPr>
-                        <m:ctrlPr>
-                          <a:rPr lang="en-US" sz="1500" i="1" noProof="0" smtClean="0">
-                            <a:latin typeface="Cambria Math" panose="02040503050406030204" pitchFamily="18" charset="0"/>
-                          </a:rPr>
-                        </m:ctrlPr>
-                      </m:sSubSupPr>
-                      <m:e>
-                        <m:r>
-                          <a:rPr lang="en-US" sz="1500" i="1" noProof="0" smtClean="0">
-                            <a:latin typeface="Cambria Math" panose="02040503050406030204" pitchFamily="18" charset="0"/>
-                          </a:rPr>
-                          <m:t>𝑆</m:t>
-                        </m:r>
-                      </m:e>
-                      <m:sub>
-                        <m:r>
-                          <a:rPr lang="en-US" sz="1500" i="1" noProof="0" smtClean="0">
-                            <a:latin typeface="Cambria Math" panose="02040503050406030204" pitchFamily="18" charset="0"/>
-                          </a:rPr>
-                          <m:t>𝑎𝑏𝑠𝑡𝑟𝑎𝑐𝑡𝑖𝑜𝑛</m:t>
-                        </m:r>
-                      </m:sub>
-                      <m:sup>
-                        <m:r>
-                          <a:rPr lang="en-US" sz="1500" i="1" noProof="0" smtClean="0">
-                            <a:latin typeface="Cambria Math" panose="02040503050406030204" pitchFamily="18" charset="0"/>
-                          </a:rPr>
-                          <m:t>′</m:t>
-                        </m:r>
-                      </m:sup>
-                    </m:sSubSup>
-                  </m:oMath>
-                </a14:m>
-                <a:r>
-                  <a:rPr lang="en-US" sz="1500" noProof="0" dirty="0"/>
-                  <a:t>		</a:t>
-                </a:r>
-                <a14:m>
-                  <m:oMath xmlns:m="http://schemas.openxmlformats.org/officeDocument/2006/math">
-                    <m:r>
-                      <a:rPr lang="en-US" sz="1500" i="1" noProof="0" smtClean="0">
-                        <a:latin typeface="Cambria Math" panose="02040503050406030204" pitchFamily="18" charset="0"/>
-                      </a:rPr>
-                      <m:t>𝑐h𝑖𝑙𝑑</m:t>
-                    </m:r>
-                    <m:r>
-                      <a:rPr lang="en-US" sz="1500" i="1" noProof="0" smtClean="0">
-                        <a:latin typeface="Cambria Math" panose="02040503050406030204" pitchFamily="18" charset="0"/>
-                      </a:rPr>
-                      <m:t> </m:t>
-                    </m:r>
-                    <m:r>
-                      <a:rPr lang="en-US" sz="1500" i="1" noProof="0" smtClean="0">
-                        <a:latin typeface="Cambria Math" panose="02040503050406030204" pitchFamily="18" charset="0"/>
-                      </a:rPr>
-                      <m:t>𝑎𝑏𝑠𝑡𝑟𝑎𝑐𝑡𝑖𝑜𝑛</m:t>
-                    </m:r>
-                    <m:r>
-                      <a:rPr lang="en-US" sz="1500" i="1" noProof="0" smtClean="0">
-                        <a:latin typeface="Cambria Math" panose="02040503050406030204" pitchFamily="18" charset="0"/>
-                      </a:rPr>
-                      <m:t> </m:t>
-                    </m:r>
-                    <m:r>
-                      <a:rPr lang="en-US" sz="1500" i="1" noProof="0" smtClean="0">
-                        <a:latin typeface="Cambria Math" panose="02040503050406030204" pitchFamily="18" charset="0"/>
-                      </a:rPr>
-                      <m:t>𝑟𝑎𝑡𝑖𝑜</m:t>
-                    </m:r>
-                  </m:oMath>
-                </a14:m>
-                <a:r>
-                  <a:rPr lang="en-US" sz="1500" noProof="0" dirty="0"/>
-                  <a:t>		</a:t>
-                </a:r>
-                <a14:m>
-                  <m:oMath xmlns:m="http://schemas.openxmlformats.org/officeDocument/2006/math">
-                    <m:r>
-                      <a:rPr lang="en-US" sz="1500" b="0" i="1" noProof="0" smtClean="0">
-                        <a:latin typeface="Cambria Math" panose="02040503050406030204" pitchFamily="18" charset="0"/>
-                      </a:rPr>
-                      <m:t>=</m:t>
-                    </m:r>
-                    <m:f>
-                      <m:fPr>
-                        <m:ctrlPr>
-                          <a:rPr lang="en-US" sz="1500" b="0" i="1" noProof="0" smtClean="0">
-                            <a:latin typeface="Cambria Math" panose="02040503050406030204" pitchFamily="18" charset="0"/>
-                          </a:rPr>
-                        </m:ctrlPr>
-                      </m:fPr>
-                      <m:num>
-                        <m:d>
-                          <m:dPr>
-                            <m:begChr m:val="|"/>
-                            <m:endChr m:val="|"/>
-                            <m:ctrlPr>
-                              <a:rPr lang="en-US" sz="1500" b="0" i="1" noProof="0" smtClean="0">
-                                <a:latin typeface="Cambria Math" panose="02040503050406030204" pitchFamily="18" charset="0"/>
-                              </a:rPr>
-                            </m:ctrlPr>
-                          </m:dPr>
-                          <m:e>
-                            <m:r>
-                              <a:rPr lang="en-US" sz="1500" b="0" i="1" noProof="0" smtClean="0">
-                                <a:latin typeface="Cambria Math" panose="02040503050406030204" pitchFamily="18" charset="0"/>
-                              </a:rPr>
-                              <m:t>𝐶</m:t>
-                            </m:r>
-                          </m:e>
-                        </m:d>
-                      </m:num>
-                      <m:den>
-                        <m:d>
-                          <m:dPr>
-                            <m:begChr m:val="|"/>
-                            <m:endChr m:val="|"/>
-                            <m:ctrlPr>
-                              <a:rPr lang="en-US" sz="1500" b="0" i="1" noProof="0" smtClean="0">
-                                <a:latin typeface="Cambria Math" panose="02040503050406030204" pitchFamily="18" charset="0"/>
-                              </a:rPr>
-                            </m:ctrlPr>
-                          </m:dPr>
-                          <m:e>
-                            <m:r>
-                              <a:rPr lang="en-US" sz="1500" b="0" i="1" noProof="0" smtClean="0">
-                                <a:latin typeface="Cambria Math" panose="02040503050406030204" pitchFamily="18" charset="0"/>
-                              </a:rPr>
-                              <m:t>𝑆</m:t>
-                            </m:r>
-                          </m:e>
-                        </m:d>
-                      </m:den>
-                    </m:f>
-                  </m:oMath>
-                </a14:m>
-                <a:endParaRPr lang="en-US" sz="1500" noProof="0" dirty="0"/>
-              </a:p>
-              <a:p>
-                <a:pPr lvl="1"/>
-                <a14:m>
-                  <m:oMath xmlns:m="http://schemas.openxmlformats.org/officeDocument/2006/math">
-                    <m:sSub>
-                      <m:sSubPr>
-                        <m:ctrlPr>
-                          <a:rPr lang="en-US" sz="1500" i="1" noProof="0" smtClean="0">
-                            <a:latin typeface="Cambria Math" panose="02040503050406030204" pitchFamily="18" charset="0"/>
-                          </a:rPr>
-                        </m:ctrlPr>
-                      </m:sSubPr>
-                      <m:e>
-                        <m:r>
-                          <a:rPr lang="en-US" sz="1500" i="1" noProof="0" smtClean="0">
-                            <a:latin typeface="Cambria Math" panose="02040503050406030204" pitchFamily="18" charset="0"/>
-                          </a:rPr>
-                          <m:t>𝑃</m:t>
-                        </m:r>
-                      </m:e>
-                      <m:sub>
-                        <m:r>
-                          <a:rPr lang="en-US" sz="1500" i="1" noProof="0" smtClean="0">
-                            <a:latin typeface="Cambria Math" panose="02040503050406030204" pitchFamily="18" charset="0"/>
-                          </a:rPr>
-                          <m:t>𝐶</m:t>
-                        </m:r>
-                      </m:sub>
-                    </m:sSub>
-                  </m:oMath>
-                </a14:m>
-                <a:r>
-                  <a:rPr lang="en-US" sz="1500" noProof="0" dirty="0"/>
-                  <a:t>		</a:t>
-                </a:r>
-                <a14:m>
-                  <m:oMath xmlns:m="http://schemas.openxmlformats.org/officeDocument/2006/math">
-                    <m:r>
-                      <a:rPr lang="en-US" sz="1500" i="1" noProof="0" smtClean="0">
-                        <a:latin typeface="Cambria Math" panose="02040503050406030204" pitchFamily="18" charset="0"/>
-                      </a:rPr>
-                      <m:t>𝑐h𝑖𝑙𝑑</m:t>
-                    </m:r>
-                    <m:r>
-                      <a:rPr lang="en-US" sz="1500" i="1" noProof="0" smtClean="0">
-                        <a:latin typeface="Cambria Math" panose="02040503050406030204" pitchFamily="18" charset="0"/>
-                      </a:rPr>
-                      <m:t> </m:t>
-                    </m:r>
-                    <m:r>
-                      <a:rPr lang="en-US" sz="1500" i="1" noProof="0" smtClean="0">
-                        <a:latin typeface="Cambria Math" panose="02040503050406030204" pitchFamily="18" charset="0"/>
-                      </a:rPr>
-                      <m:t>𝑝𝑒𝑟</m:t>
-                    </m:r>
-                    <m:r>
-                      <a:rPr lang="en-US" sz="1500" i="1" noProof="0" smtClean="0">
-                        <a:latin typeface="Cambria Math" panose="02040503050406030204" pitchFamily="18" charset="0"/>
-                      </a:rPr>
-                      <m:t> </m:t>
-                    </m:r>
-                    <m:r>
-                      <a:rPr lang="en-US" sz="1500" i="1" noProof="0" smtClean="0">
-                        <a:latin typeface="Cambria Math" panose="02040503050406030204" pitchFamily="18" charset="0"/>
-                      </a:rPr>
-                      <m:t>𝑝𝑎𝑟𝑒𝑛𝑡</m:t>
-                    </m:r>
-                    <m:r>
-                      <a:rPr lang="en-US" sz="1500" i="1" noProof="0" smtClean="0">
-                        <a:latin typeface="Cambria Math" panose="02040503050406030204" pitchFamily="18" charset="0"/>
-                      </a:rPr>
-                      <m:t> </m:t>
-                    </m:r>
-                    <m:r>
-                      <a:rPr lang="en-US" sz="1500" i="1" noProof="0" smtClean="0">
-                        <a:latin typeface="Cambria Math" panose="02040503050406030204" pitchFamily="18" charset="0"/>
-                      </a:rPr>
-                      <m:t>𝑟𝑎𝑡𝑖𝑜</m:t>
-                    </m:r>
-                  </m:oMath>
-                </a14:m>
-                <a:r>
-                  <a:rPr lang="en-US" sz="1500" noProof="0" dirty="0"/>
-                  <a:t>		</a:t>
-                </a:r>
-                <a14:m>
-                  <m:oMath xmlns:m="http://schemas.openxmlformats.org/officeDocument/2006/math">
-                    <m:r>
-                      <a:rPr lang="en-US" sz="1500" i="1" noProof="0" smtClean="0">
-                        <a:latin typeface="Cambria Math" panose="02040503050406030204" pitchFamily="18" charset="0"/>
-                      </a:rPr>
-                      <m:t>=</m:t>
-                    </m:r>
-                    <m:f>
-                      <m:fPr>
-                        <m:ctrlPr>
-                          <a:rPr lang="en-US" sz="1500" i="1" noProof="0" smtClean="0">
-                            <a:latin typeface="Cambria Math" panose="02040503050406030204" pitchFamily="18" charset="0"/>
-                          </a:rPr>
-                        </m:ctrlPr>
-                      </m:fPr>
-                      <m:num>
-                        <m:d>
-                          <m:dPr>
-                            <m:begChr m:val="|"/>
-                            <m:endChr m:val="|"/>
-                            <m:ctrlPr>
-                              <a:rPr lang="en-US" sz="1500" i="1" noProof="0" smtClean="0">
-                                <a:latin typeface="Cambria Math" panose="02040503050406030204" pitchFamily="18" charset="0"/>
-                              </a:rPr>
-                            </m:ctrlPr>
-                          </m:dPr>
-                          <m:e>
-                            <m:r>
-                              <a:rPr lang="en-US" sz="1500" i="1" noProof="0" smtClean="0">
-                                <a:latin typeface="Cambria Math" panose="02040503050406030204" pitchFamily="18" charset="0"/>
-                              </a:rPr>
-                              <m:t>𝐶</m:t>
-                            </m:r>
-                          </m:e>
-                        </m:d>
-                      </m:num>
-                      <m:den>
-                        <m:d>
-                          <m:dPr>
-                            <m:begChr m:val="|"/>
-                            <m:endChr m:val="|"/>
-                            <m:ctrlPr>
-                              <a:rPr lang="en-US" sz="1500" i="1" noProof="0" smtClean="0">
-                                <a:latin typeface="Cambria Math" panose="02040503050406030204" pitchFamily="18" charset="0"/>
-                              </a:rPr>
-                            </m:ctrlPr>
-                          </m:dPr>
-                          <m:e>
-                            <m:r>
-                              <a:rPr lang="en-US" sz="1500" b="0" i="1" noProof="0" smtClean="0">
-                                <a:latin typeface="Cambria Math" panose="02040503050406030204" pitchFamily="18" charset="0"/>
-                              </a:rPr>
-                              <m:t>𝑃</m:t>
-                            </m:r>
-                          </m:e>
-                        </m:d>
-                      </m:den>
-                    </m:f>
-                  </m:oMath>
-                </a14:m>
-                <a:endParaRPr lang="en-US" sz="1500" noProof="0" dirty="0"/>
-              </a:p>
-              <a:p>
-                <a:pPr lvl="1"/>
-                <a14:m>
-                  <m:oMath xmlns:m="http://schemas.openxmlformats.org/officeDocument/2006/math">
-                    <m:sSub>
-                      <m:sSubPr>
-                        <m:ctrlPr>
-                          <a:rPr lang="en-US" sz="1500" i="1" noProof="0" smtClean="0">
-                            <a:latin typeface="Cambria Math" panose="02040503050406030204" pitchFamily="18" charset="0"/>
-                          </a:rPr>
-                        </m:ctrlPr>
-                      </m:sSubPr>
-                      <m:e>
-                        <m:r>
-                          <a:rPr lang="en-US" sz="1500" i="1" noProof="0" smtClean="0">
-                            <a:latin typeface="Cambria Math" panose="02040503050406030204" pitchFamily="18" charset="0"/>
-                          </a:rPr>
-                          <m:t>𝜋</m:t>
-                        </m:r>
-                      </m:e>
-                      <m:sub>
-                        <m:r>
-                          <a:rPr lang="en-US" sz="1500" i="1" noProof="0" smtClean="0">
-                            <a:latin typeface="Cambria Math" panose="02040503050406030204" pitchFamily="18" charset="0"/>
-                          </a:rPr>
-                          <m:t>𝑎𝑔𝑟𝑒𝑒𝑚𝑒𝑛𝑡</m:t>
-                        </m:r>
-                      </m:sub>
-                    </m:sSub>
-                  </m:oMath>
-                </a14:m>
-                <a:r>
-                  <a:rPr lang="en-US" sz="1500" noProof="0" dirty="0"/>
-                  <a:t>		</a:t>
-                </a:r>
-                <a14:m>
-                  <m:oMath xmlns:m="http://schemas.openxmlformats.org/officeDocument/2006/math">
-                    <m:r>
-                      <a:rPr lang="en-US" sz="1500" i="1" noProof="0" smtClean="0">
-                        <a:latin typeface="Cambria Math" panose="02040503050406030204" pitchFamily="18" charset="0"/>
-                      </a:rPr>
-                      <m:t>𝑃𝑜𝑙𝑖𝑐𝑦</m:t>
-                    </m:r>
-                    <m:r>
-                      <a:rPr lang="en-US" sz="1500" i="1" noProof="0" smtClean="0">
-                        <a:latin typeface="Cambria Math" panose="02040503050406030204" pitchFamily="18" charset="0"/>
-                      </a:rPr>
-                      <m:t> </m:t>
-                    </m:r>
-                    <m:r>
-                      <a:rPr lang="en-US" sz="1500" i="1" noProof="0" smtClean="0">
-                        <a:latin typeface="Cambria Math" panose="02040503050406030204" pitchFamily="18" charset="0"/>
-                      </a:rPr>
-                      <m:t>𝑎𝑔𝑟𝑒𝑒𝑚𝑒𝑛𝑡</m:t>
-                    </m:r>
-                  </m:oMath>
-                </a14:m>
-                <a:endParaRPr lang="en-US" sz="1500" noProof="0" dirty="0"/>
-              </a:p>
-              <a:p>
-                <a:pPr lvl="1"/>
-                <a14:m>
-                  <m:oMath xmlns:m="http://schemas.openxmlformats.org/officeDocument/2006/math">
-                    <m:sSub>
-                      <m:sSubPr>
-                        <m:ctrlPr>
-                          <a:rPr lang="en-US" sz="1500" i="1" noProof="0" smtClean="0">
-                            <a:latin typeface="Cambria Math" panose="02040503050406030204" pitchFamily="18" charset="0"/>
-                          </a:rPr>
-                        </m:ctrlPr>
-                      </m:sSubPr>
-                      <m:e>
-                        <m:r>
-                          <a:rPr lang="en-US" sz="1500" i="1" noProof="0" smtClean="0">
-                            <a:latin typeface="Cambria Math" panose="02040503050406030204" pitchFamily="18" charset="0"/>
-                          </a:rPr>
-                          <m:t>𝑄</m:t>
-                        </m:r>
-                      </m:e>
-                      <m:sub>
-                        <m:r>
-                          <a:rPr lang="en-US" sz="1500" i="1" noProof="0" smtClean="0">
-                            <a:latin typeface="Cambria Math" panose="02040503050406030204" pitchFamily="18" charset="0"/>
-                          </a:rPr>
-                          <m:t>𝑒𝑟𝑟𝑜𝑟</m:t>
-                        </m:r>
-                      </m:sub>
-                    </m:sSub>
-                  </m:oMath>
-                </a14:m>
-                <a:r>
-                  <a:rPr lang="en-US" sz="1500" noProof="0" dirty="0"/>
-                  <a:t>		</a:t>
-                </a:r>
-                <a14:m>
-                  <m:oMath xmlns:m="http://schemas.openxmlformats.org/officeDocument/2006/math">
-                    <m:r>
-                      <a:rPr lang="en-US" sz="1500" i="1" noProof="0" smtClean="0">
-                        <a:latin typeface="Cambria Math" panose="02040503050406030204" pitchFamily="18" charset="0"/>
-                      </a:rPr>
-                      <m:t>𝑄</m:t>
-                    </m:r>
-                    <m:r>
-                      <a:rPr lang="en-US" sz="1500" i="1" noProof="0" smtClean="0">
-                        <a:latin typeface="Cambria Math" panose="02040503050406030204" pitchFamily="18" charset="0"/>
-                      </a:rPr>
-                      <m:t>−</m:t>
-                    </m:r>
-                    <m:r>
-                      <a:rPr lang="en-US" sz="1500" i="1" noProof="0" smtClean="0">
-                        <a:latin typeface="Cambria Math" panose="02040503050406030204" pitchFamily="18" charset="0"/>
-                      </a:rPr>
-                      <m:t>𝑣𝑎𝑙𝑢𝑒</m:t>
-                    </m:r>
-                    <m:r>
-                      <a:rPr lang="en-US" sz="1500" i="1" noProof="0" smtClean="0">
-                        <a:latin typeface="Cambria Math" panose="02040503050406030204" pitchFamily="18" charset="0"/>
-                      </a:rPr>
-                      <m:t> </m:t>
-                    </m:r>
-                    <m:r>
-                      <a:rPr lang="en-US" sz="1500" i="1" noProof="0" smtClean="0">
-                        <a:latin typeface="Cambria Math" panose="02040503050406030204" pitchFamily="18" charset="0"/>
-                      </a:rPr>
-                      <m:t>𝑒𝑟𝑟𝑜𝑟</m:t>
-                    </m:r>
-                  </m:oMath>
-                </a14:m>
-                <a:endParaRPr lang="en-US" sz="1500" noProof="0" dirty="0"/>
-              </a:p>
-              <a:p>
-                <a:pPr lvl="1"/>
-                <a14:m>
-                  <m:oMath xmlns:m="http://schemas.openxmlformats.org/officeDocument/2006/math">
-                    <m:sSub>
-                      <m:sSubPr>
-                        <m:ctrlPr>
-                          <a:rPr lang="en-US" sz="1500" i="1" noProof="0" smtClean="0">
-                            <a:latin typeface="Cambria Math" panose="02040503050406030204" pitchFamily="18" charset="0"/>
-                          </a:rPr>
-                        </m:ctrlPr>
-                      </m:sSubPr>
-                      <m:e>
-                        <m:r>
-                          <a:rPr lang="en-US" sz="1500" i="1" noProof="0" smtClean="0">
-                            <a:latin typeface="Cambria Math" panose="02040503050406030204" pitchFamily="18" charset="0"/>
-                          </a:rPr>
-                          <m:t>𝑇</m:t>
-                        </m:r>
-                      </m:e>
-                      <m:sub>
-                        <m:r>
-                          <a:rPr lang="en-US" sz="1500" i="1" noProof="0" smtClean="0">
-                            <a:latin typeface="Cambria Math" panose="02040503050406030204" pitchFamily="18" charset="0"/>
-                          </a:rPr>
-                          <m:t>𝑜𝑣𝑒𝑟h𝑒𝑎𝑑</m:t>
-                        </m:r>
-                      </m:sub>
-                    </m:sSub>
-                  </m:oMath>
-                </a14:m>
-                <a:r>
-                  <a:rPr lang="en-US" sz="1500" noProof="0" dirty="0"/>
-                  <a:t>		</a:t>
-                </a:r>
-                <a14:m>
-                  <m:oMath xmlns:m="http://schemas.openxmlformats.org/officeDocument/2006/math">
-                    <m:r>
-                      <a:rPr lang="en-US" sz="1500" i="1" noProof="0" smtClean="0">
-                        <a:latin typeface="Cambria Math" panose="02040503050406030204" pitchFamily="18" charset="0"/>
-                      </a:rPr>
-                      <m:t>𝑅𝑢𝑛𝑡𝑖𝑚𝑒</m:t>
-                    </m:r>
-                    <m:r>
-                      <a:rPr lang="en-US" sz="1500" i="1" noProof="0" smtClean="0">
-                        <a:latin typeface="Cambria Math" panose="02040503050406030204" pitchFamily="18" charset="0"/>
-                      </a:rPr>
-                      <m:t> </m:t>
-                    </m:r>
-                    <m:r>
-                      <a:rPr lang="en-US" sz="1500" i="1" noProof="0" smtClean="0">
-                        <a:latin typeface="Cambria Math" panose="02040503050406030204" pitchFamily="18" charset="0"/>
-                      </a:rPr>
-                      <m:t>𝑜𝑣𝑒𝑟h𝑒𝑎𝑑</m:t>
-                    </m:r>
-                  </m:oMath>
-                </a14:m>
-                <a:r>
-                  <a:rPr lang="en-US" sz="1500" noProof="0" dirty="0"/>
-                  <a:t>		</a:t>
-                </a:r>
-                <a14:m>
-                  <m:oMath xmlns:m="http://schemas.openxmlformats.org/officeDocument/2006/math">
-                    <m:r>
-                      <a:rPr lang="en-US" sz="1500" b="0" i="1" noProof="0" smtClean="0">
-                        <a:latin typeface="Cambria Math" panose="02040503050406030204" pitchFamily="18" charset="0"/>
-                      </a:rPr>
-                      <m:t>=</m:t>
-                    </m:r>
-                    <m:sSub>
-                      <m:sSubPr>
-                        <m:ctrlPr>
-                          <a:rPr lang="en-US" sz="1500" b="0" i="1" noProof="0" smtClean="0">
-                            <a:latin typeface="Cambria Math" panose="02040503050406030204" pitchFamily="18" charset="0"/>
-                          </a:rPr>
-                        </m:ctrlPr>
-                      </m:sSubPr>
-                      <m:e>
-                        <m:r>
-                          <a:rPr lang="en-US" sz="1500" b="0" i="1" noProof="0" smtClean="0">
-                            <a:latin typeface="Cambria Math" panose="02040503050406030204" pitchFamily="18" charset="0"/>
-                          </a:rPr>
-                          <m:t>𝑇</m:t>
-                        </m:r>
-                      </m:e>
-                      <m:sub>
-                        <m:r>
-                          <a:rPr lang="en-US" sz="1500" b="0" i="1" noProof="0" smtClean="0">
-                            <a:latin typeface="Cambria Math" panose="02040503050406030204" pitchFamily="18" charset="0"/>
-                          </a:rPr>
-                          <m:t>𝑠𝑝𝑙𝑖𝑡</m:t>
-                        </m:r>
-                      </m:sub>
-                    </m:sSub>
-                    <m:r>
-                      <a:rPr lang="en-US" sz="1500" b="0" i="1" noProof="0" smtClean="0">
-                        <a:latin typeface="Cambria Math" panose="02040503050406030204" pitchFamily="18" charset="0"/>
-                      </a:rPr>
-                      <m:t>/</m:t>
-                    </m:r>
-                    <m:sSub>
-                      <m:sSubPr>
-                        <m:ctrlPr>
-                          <a:rPr lang="en-US" sz="1500" b="0" i="1" noProof="0" smtClean="0">
-                            <a:latin typeface="Cambria Math" panose="02040503050406030204" pitchFamily="18" charset="0"/>
-                          </a:rPr>
-                        </m:ctrlPr>
-                      </m:sSubPr>
-                      <m:e>
-                        <m:r>
-                          <a:rPr lang="en-US" sz="1500" b="0" i="1" noProof="0" smtClean="0">
-                            <a:latin typeface="Cambria Math" panose="02040503050406030204" pitchFamily="18" charset="0"/>
-                          </a:rPr>
-                          <m:t>𝑇</m:t>
-                        </m:r>
-                      </m:e>
-                      <m:sub>
-                        <m:r>
-                          <a:rPr lang="en-US" sz="1500" b="0" i="1" noProof="0" smtClean="0">
-                            <a:latin typeface="Cambria Math" panose="02040503050406030204" pitchFamily="18" charset="0"/>
-                          </a:rPr>
-                          <m:t>𝑟𝑒𝑐𝑜𝑛𝑠𝑡𝑟𝑢𝑐𝑡𝑒𝑑</m:t>
-                        </m:r>
-                      </m:sub>
-                    </m:sSub>
-                  </m:oMath>
-                </a14:m>
-                <a:endParaRPr lang="en-US" sz="1500" noProof="0" dirty="0"/>
-              </a:p>
-              <a:p>
-                <a:pPr lvl="1"/>
-                <a14:m>
-                  <m:oMath xmlns:m="http://schemas.openxmlformats.org/officeDocument/2006/math">
-                    <m:sSub>
-                      <m:sSubPr>
-                        <m:ctrlPr>
-                          <a:rPr lang="en-US" sz="1500" i="1" noProof="0" smtClean="0">
-                            <a:latin typeface="Cambria Math" panose="02040503050406030204" pitchFamily="18" charset="0"/>
-                          </a:rPr>
-                        </m:ctrlPr>
-                      </m:sSubPr>
-                      <m:e>
-                        <m:r>
-                          <a:rPr lang="en-US" sz="1500" i="1" noProof="0" smtClean="0">
-                            <a:latin typeface="Cambria Math" panose="02040503050406030204" pitchFamily="18" charset="0"/>
-                          </a:rPr>
-                          <m:t>𝑀</m:t>
-                        </m:r>
-                      </m:e>
-                      <m:sub>
-                        <m:r>
-                          <a:rPr lang="en-US" sz="1500" i="1" noProof="0" smtClean="0">
-                            <a:latin typeface="Cambria Math" panose="02040503050406030204" pitchFamily="18" charset="0"/>
-                          </a:rPr>
-                          <m:t>𝑜𝑣𝑒𝑟h𝑒𝑎𝑑</m:t>
-                        </m:r>
-                      </m:sub>
-                    </m:sSub>
-                  </m:oMath>
-                </a14:m>
-                <a:r>
-                  <a:rPr lang="en-US" sz="1500" noProof="0" dirty="0"/>
-                  <a:t> 		</a:t>
-                </a:r>
-                <a14:m>
-                  <m:oMath xmlns:m="http://schemas.openxmlformats.org/officeDocument/2006/math">
-                    <m:r>
-                      <a:rPr lang="en-US" sz="1500" i="1" noProof="0" smtClean="0">
-                        <a:latin typeface="Cambria Math" panose="02040503050406030204" pitchFamily="18" charset="0"/>
-                      </a:rPr>
-                      <m:t>𝑀𝑒𝑚𝑜𝑟𝑦</m:t>
-                    </m:r>
-                    <m:r>
-                      <a:rPr lang="en-US" sz="1500" i="1" noProof="0" smtClean="0">
-                        <a:latin typeface="Cambria Math" panose="02040503050406030204" pitchFamily="18" charset="0"/>
-                      </a:rPr>
-                      <m:t> </m:t>
-                    </m:r>
-                    <m:r>
-                      <a:rPr lang="en-US" sz="1500" i="1" noProof="0" smtClean="0">
-                        <a:latin typeface="Cambria Math" panose="02040503050406030204" pitchFamily="18" charset="0"/>
-                      </a:rPr>
-                      <m:t>𝑜𝑏𝑒𝑟h𝑒𝑎𝑑</m:t>
-                    </m:r>
-                  </m:oMath>
-                </a14:m>
-                <a:r>
-                  <a:rPr lang="en-US" sz="1500" noProof="0" dirty="0"/>
-                  <a:t>		</a:t>
-                </a:r>
-                <a14:m>
-                  <m:oMath xmlns:m="http://schemas.openxmlformats.org/officeDocument/2006/math">
-                    <m:r>
-                      <a:rPr lang="en-US" sz="1500" b="0" i="1" noProof="0" smtClean="0">
-                        <a:latin typeface="Cambria Math" panose="02040503050406030204" pitchFamily="18" charset="0"/>
-                      </a:rPr>
-                      <m:t>=</m:t>
-                    </m:r>
-                    <m:f>
-                      <m:fPr>
-                        <m:ctrlPr>
-                          <a:rPr lang="en-US" sz="1500" b="0" i="1" noProof="0" smtClean="0">
-                            <a:latin typeface="Cambria Math" panose="02040503050406030204" pitchFamily="18" charset="0"/>
-                          </a:rPr>
-                        </m:ctrlPr>
-                      </m:fPr>
-                      <m:num>
-                        <m:sSub>
-                          <m:sSubPr>
-                            <m:ctrlPr>
-                              <a:rPr lang="en-US" sz="1500" b="0" i="1" noProof="0" smtClean="0">
-                                <a:latin typeface="Cambria Math" panose="02040503050406030204" pitchFamily="18" charset="0"/>
-                              </a:rPr>
-                            </m:ctrlPr>
-                          </m:sSubPr>
-                          <m:e>
-                            <m:r>
-                              <a:rPr lang="en-US" sz="1500" b="0" i="1" noProof="0" smtClean="0">
-                                <a:latin typeface="Cambria Math" panose="02040503050406030204" pitchFamily="18" charset="0"/>
-                              </a:rPr>
-                              <m:t>𝑀</m:t>
-                            </m:r>
-                          </m:e>
-                          <m:sub>
-                            <m:r>
-                              <a:rPr lang="en-US" sz="1500" b="0" i="1" noProof="0" smtClean="0">
-                                <a:latin typeface="Cambria Math" panose="02040503050406030204" pitchFamily="18" charset="0"/>
-                              </a:rPr>
-                              <m:t>𝑝𝑟𝑜𝑐𝑒𝑠𝑠</m:t>
-                            </m:r>
-                          </m:sub>
-                        </m:sSub>
-                      </m:num>
-                      <m:den>
-                        <m:sSub>
-                          <m:sSubPr>
-                            <m:ctrlPr>
-                              <a:rPr lang="en-US" sz="1500" b="0" i="1" noProof="0" smtClean="0">
-                                <a:latin typeface="Cambria Math" panose="02040503050406030204" pitchFamily="18" charset="0"/>
-                              </a:rPr>
-                            </m:ctrlPr>
-                          </m:sSubPr>
-                          <m:e>
-                            <m:r>
-                              <a:rPr lang="en-US" sz="1500" b="0" i="1" noProof="0" smtClean="0">
-                                <a:latin typeface="Cambria Math" panose="02040503050406030204" pitchFamily="18" charset="0"/>
-                              </a:rPr>
-                              <m:t>𝑀</m:t>
-                            </m:r>
-                          </m:e>
-                          <m:sub>
-                            <m:r>
-                              <a:rPr lang="en-US" sz="1500" b="0" i="1" noProof="0" smtClean="0">
-                                <a:latin typeface="Cambria Math" panose="02040503050406030204" pitchFamily="18" charset="0"/>
-                              </a:rPr>
-                              <m:t>𝑛𝑜𝑟𝑚𝑎𝑙</m:t>
-                            </m:r>
-                          </m:sub>
-                        </m:sSub>
-                      </m:den>
-                    </m:f>
-                  </m:oMath>
-                </a14:m>
-                <a:endParaRPr lang="en-US" sz="1500" noProof="0" dirty="0"/>
-              </a:p>
-              <a:p>
-                <a:pPr lvl="1"/>
-                <a14:m>
-                  <m:oMath xmlns:m="http://schemas.openxmlformats.org/officeDocument/2006/math">
-                    <m:sSub>
-                      <m:sSubPr>
-                        <m:ctrlPr>
-                          <a:rPr lang="en-US" sz="1500" i="1" noProof="0" smtClean="0">
-                            <a:latin typeface="Cambria Math" panose="02040503050406030204" pitchFamily="18" charset="0"/>
-                          </a:rPr>
-                        </m:ctrlPr>
-                      </m:sSubPr>
-                      <m:e>
-                        <m:r>
-                          <a:rPr lang="en-US" sz="1500" i="1" noProof="0" smtClean="0">
-                            <a:latin typeface="Cambria Math" panose="02040503050406030204" pitchFamily="18" charset="0"/>
-                          </a:rPr>
-                          <m:t>𝑄</m:t>
-                        </m:r>
-                      </m:e>
-                      <m:sub>
-                        <m:r>
-                          <a:rPr lang="en-US" sz="1500" i="1" noProof="0" smtClean="0">
-                            <a:latin typeface="Cambria Math" panose="02040503050406030204" pitchFamily="18" charset="0"/>
-                          </a:rPr>
-                          <m:t>𝑎𝑣𝑒𝑟𝑎𝑔𝑒</m:t>
-                        </m:r>
-                      </m:sub>
-                    </m:sSub>
-                  </m:oMath>
-                </a14:m>
-                <a:r>
-                  <a:rPr lang="en-US" sz="1500" noProof="0" dirty="0"/>
-                  <a:t>		</a:t>
-                </a:r>
-                <a14:m>
-                  <m:oMath xmlns:m="http://schemas.openxmlformats.org/officeDocument/2006/math">
-                    <m:r>
-                      <a:rPr lang="en-US" sz="1500" i="1" noProof="0" smtClean="0">
-                        <a:latin typeface="Cambria Math" panose="02040503050406030204" pitchFamily="18" charset="0"/>
-                      </a:rPr>
-                      <m:t>𝑏𝑒𝑠𝑡</m:t>
-                    </m:r>
-                    <m:r>
-                      <a:rPr lang="en-US" sz="1500" i="1" noProof="0" smtClean="0">
-                        <a:latin typeface="Cambria Math" panose="02040503050406030204" pitchFamily="18" charset="0"/>
-                      </a:rPr>
-                      <m:t> </m:t>
-                    </m:r>
-                    <m:r>
-                      <a:rPr lang="en-US" sz="1500" i="1" noProof="0" smtClean="0">
-                        <a:latin typeface="Cambria Math" panose="02040503050406030204" pitchFamily="18" charset="0"/>
-                      </a:rPr>
-                      <m:t>𝑎𝑣𝑒𝑟𝑎𝑔𝑒</m:t>
-                    </m:r>
-                    <m:r>
-                      <a:rPr lang="en-US" sz="1500" i="1" noProof="0" smtClean="0">
-                        <a:latin typeface="Cambria Math" panose="02040503050406030204" pitchFamily="18" charset="0"/>
-                      </a:rPr>
-                      <m:t> </m:t>
-                    </m:r>
-                    <m:r>
-                      <a:rPr lang="en-US" sz="1500" i="1" noProof="0" smtClean="0">
-                        <a:latin typeface="Cambria Math" panose="02040503050406030204" pitchFamily="18" charset="0"/>
-                      </a:rPr>
-                      <m:t>𝑄</m:t>
-                    </m:r>
-                    <m:r>
-                      <a:rPr lang="en-US" sz="1500" i="1" noProof="0" smtClean="0">
-                        <a:latin typeface="Cambria Math" panose="02040503050406030204" pitchFamily="18" charset="0"/>
-                      </a:rPr>
-                      <m:t>−</m:t>
-                    </m:r>
-                    <m:r>
-                      <a:rPr lang="en-US" sz="1500" i="1" noProof="0" smtClean="0">
-                        <a:latin typeface="Cambria Math" panose="02040503050406030204" pitchFamily="18" charset="0"/>
-                      </a:rPr>
-                      <m:t>𝑡𝑎𝑏𝑙𝑒</m:t>
-                    </m:r>
-                  </m:oMath>
-                </a14:m>
-                <a:r>
-                  <a:rPr lang="en-US" sz="1500" noProof="0" dirty="0"/>
-                  <a:t>		</a:t>
-                </a:r>
-              </a:p>
-              <a:p>
-                <a:pPr lvl="1"/>
-                <a:endParaRPr lang="en-US" noProof="0" dirty="0"/>
-              </a:p>
-            </p:txBody>
-          </p:sp>
-        </mc:Choice>
-        <mc:Fallback xmlns="">
-          <p:sp>
-            <p:nvSpPr>
-              <p:cNvPr id="3" name="Textplatzhalter 2">
-                <a:extLst>
-                  <a:ext uri="{FF2B5EF4-FFF2-40B4-BE49-F238E27FC236}">
-                    <a16:creationId xmlns:a16="http://schemas.microsoft.com/office/drawing/2014/main" id="{E7C291CB-A98D-656F-62CA-EC5AE23D5B4F}"/>
-                  </a:ext>
-                </a:extLst>
-              </p:cNvPr>
-              <p:cNvSpPr>
-                <a:spLocks noGrp="1" noRot="1" noChangeAspect="1" noMove="1" noResize="1" noEditPoints="1" noAdjustHandles="1" noChangeArrowheads="1" noChangeShapeType="1" noTextEdit="1"/>
-              </p:cNvSpPr>
-              <p:nvPr>
-                <p:ph type="body" sz="quarter" idx="14"/>
-              </p:nvPr>
-            </p:nvSpPr>
-            <p:spPr>
-              <a:blipFill>
-                <a:blip r:embed="rId2"/>
-                <a:stretch>
-                  <a:fillRect l="-556" t="-2259"/>
-                </a:stretch>
-              </a:blipFill>
-            </p:spPr>
-            <p:txBody>
-              <a:bodyPr/>
-              <a:lstStyle/>
-              <a:p>
-                <a:r>
-                  <a:rPr lang="de-DE">
-                    <a:noFill/>
-                  </a:rPr>
-                  <a:t> </a:t>
-                </a:r>
-              </a:p>
-            </p:txBody>
-          </p:sp>
-        </mc:Fallback>
-      </mc:AlternateContent>
+      <p:sp>
+        <p:nvSpPr>
+          <p:cNvPr id="3" name="Textplatzhalter 2">
+            <a:extLst>
+              <a:ext uri="{FF2B5EF4-FFF2-40B4-BE49-F238E27FC236}">
+                <a16:creationId xmlns:a16="http://schemas.microsoft.com/office/drawing/2014/main" id="{E7C291CB-A98D-656F-62CA-EC5AE23D5B4F}"/>
+              </a:ext>
+            </a:extLst>
+          </p:cNvPr>
+          <p:cNvSpPr>
+            <a:spLocks noGrp="1"/>
+          </p:cNvSpPr>
+          <p:nvPr>
+            <p:ph type="body" sz="quarter" idx="14"/>
+          </p:nvPr>
+        </p:nvSpPr>
+        <p:spPr/>
+        <p:txBody>
+          <a:bodyPr>
+            <a:normAutofit/>
+          </a:bodyPr>
+          <a:lstStyle/>
+          <a:p>
+            <a:r>
+              <a:rPr lang="en-US" noProof="0" dirty="0"/>
+              <a:t>Reconstruction done in reverse order</a:t>
+            </a:r>
+          </a:p>
+          <a:p>
+            <a:r>
+              <a:rPr lang="en-US" noProof="0" dirty="0"/>
+              <a:t>Reconstructed table formed out of parent </a:t>
+            </a:r>
+            <a:br>
+              <a:rPr lang="en-US" noProof="0" dirty="0"/>
+            </a:br>
+            <a:r>
+              <a:rPr lang="en-US" noProof="0" dirty="0"/>
+              <a:t>and child table</a:t>
+            </a:r>
+          </a:p>
+          <a:p>
+            <a:r>
+              <a:rPr lang="en-US" noProof="0" dirty="0"/>
+              <a:t>If needed best direction is applied</a:t>
+            </a:r>
+          </a:p>
+          <a:p>
+            <a:r>
+              <a:rPr lang="en-US" noProof="0" dirty="0"/>
+              <a:t>“Force” best direction:</a:t>
+            </a:r>
+          </a:p>
+          <a:p>
+            <a:endParaRPr lang="en-US" noProof="0" dirty="0"/>
+          </a:p>
+          <a:p>
+            <a:pPr lvl="1"/>
+            <a:endParaRPr lang="en-US" noProof="0" dirty="0"/>
+          </a:p>
+        </p:txBody>
+      </p:sp>
       <p:sp>
         <p:nvSpPr>
           <p:cNvPr id="4" name="Fußzeilenplatzhalter 3">
@@ -11804,6 +11356,113 @@
           </a:p>
         </p:txBody>
       </p:sp>
+      <p:pic>
+        <p:nvPicPr>
+          <p:cNvPr id="2050" name="Picture 2">
+            <a:extLst>
+              <a:ext uri="{FF2B5EF4-FFF2-40B4-BE49-F238E27FC236}">
+                <a16:creationId xmlns:a16="http://schemas.microsoft.com/office/drawing/2014/main" id="{B02CB35D-24A1-F6FB-EA93-F7BD193B3C4D}"/>
+              </a:ext>
+            </a:extLst>
+          </p:cNvPr>
+          <p:cNvPicPr>
+            <a:picLocks noChangeAspect="1" noChangeArrowheads="1"/>
+          </p:cNvPicPr>
+          <p:nvPr/>
+        </p:nvPicPr>
+        <p:blipFill>
+          <a:blip r:embed="rId2" cstate="print">
+            <a:extLst>
+              <a:ext uri="{28A0092B-C50C-407E-A947-70E740481C1C}">
+                <a14:useLocalDpi xmlns:a14="http://schemas.microsoft.com/office/drawing/2010/main" val="0"/>
+              </a:ext>
+            </a:extLst>
+          </a:blip>
+          <a:srcRect/>
+          <a:stretch>
+            <a:fillRect/>
+          </a:stretch>
+        </p:blipFill>
+        <p:spPr bwMode="auto">
+          <a:xfrm>
+            <a:off x="3936683" y="1969631"/>
+            <a:ext cx="4940617" cy="2741913"/>
+          </a:xfrm>
+          <a:prstGeom prst="rect">
+            <a:avLst/>
+          </a:prstGeom>
+          <a:noFill/>
+          <a:extLst>
+            <a:ext uri="{909E8E84-426E-40DD-AFC4-6F175D3DCCD1}">
+              <a14:hiddenFill xmlns:a14="http://schemas.microsoft.com/office/drawing/2010/main">
+                <a:solidFill>
+                  <a:srgbClr val="FFFFFF"/>
+                </a:solidFill>
+              </a14:hiddenFill>
+            </a:ext>
+          </a:extLst>
+        </p:spPr>
+      </p:pic>
+      <p:pic>
+        <p:nvPicPr>
+          <p:cNvPr id="9" name="Grafik 8">
+            <a:extLst>
+              <a:ext uri="{FF2B5EF4-FFF2-40B4-BE49-F238E27FC236}">
+                <a16:creationId xmlns:a16="http://schemas.microsoft.com/office/drawing/2014/main" id="{31060B8A-E254-6AC4-7EBB-C27EEC7C3459}"/>
+              </a:ext>
+            </a:extLst>
+          </p:cNvPr>
+          <p:cNvPicPr>
+            <a:picLocks noChangeAspect="1"/>
+          </p:cNvPicPr>
+          <p:nvPr/>
+        </p:nvPicPr>
+        <p:blipFill>
+          <a:blip r:embed="rId3"/>
+          <a:stretch>
+            <a:fillRect/>
+          </a:stretch>
+        </p:blipFill>
+        <p:spPr>
+          <a:xfrm>
+            <a:off x="356234" y="2521153"/>
+            <a:ext cx="3210837" cy="1884045"/>
+          </a:xfrm>
+          <a:prstGeom prst="rect">
+            <a:avLst/>
+          </a:prstGeom>
+        </p:spPr>
+      </p:pic>
+      <p:pic>
+        <p:nvPicPr>
+          <p:cNvPr id="11" name="Grafik 10">
+            <a:extLst>
+              <a:ext uri="{FF2B5EF4-FFF2-40B4-BE49-F238E27FC236}">
+                <a16:creationId xmlns:a16="http://schemas.microsoft.com/office/drawing/2014/main" id="{8D49EF8A-F80C-7551-CD2E-7FBE5E03A007}"/>
+              </a:ext>
+            </a:extLst>
+          </p:cNvPr>
+          <p:cNvPicPr>
+            <a:picLocks noChangeAspect="1"/>
+          </p:cNvPicPr>
+          <p:nvPr/>
+        </p:nvPicPr>
+        <p:blipFill>
+          <a:blip r:embed="rId4"/>
+          <a:stretch>
+            <a:fillRect/>
+          </a:stretch>
+        </p:blipFill>
+        <p:spPr>
+          <a:xfrm>
+            <a:off x="6250689" y="469927"/>
+            <a:ext cx="2534004" cy="1324160"/>
+          </a:xfrm>
+          <a:prstGeom prst="rect">
+            <a:avLst/>
+          </a:prstGeom>
+        </p:spPr>
+      </p:pic>
     </p:spTree>
     <p:extLst>
       <p:ext uri="{BB962C8B-B14F-4D97-AF65-F5344CB8AC3E}">
@@ -11839,7 +11498,7 @@
           <p:cNvPr id="2" name="Titel 1">
             <a:extLst>
               <a:ext uri="{FF2B5EF4-FFF2-40B4-BE49-F238E27FC236}">
-                <a16:creationId xmlns:a16="http://schemas.microsoft.com/office/drawing/2014/main" id="{FB5CD0E9-78A3-3F77-F640-334E7BDC967F}"/>
+                <a16:creationId xmlns:a16="http://schemas.microsoft.com/office/drawing/2014/main" id="{B81E4026-81C9-95C2-E483-599B3305E7A9}"/>
               </a:ext>
             </a:extLst>
           </p:cNvPr>
@@ -11859,6 +11518,1094 @@
           <a:p>
             <a:r>
               <a:rPr lang="en-US" noProof="0" dirty="0"/>
+              <a:t>Evaluation</a:t>
+            </a:r>
+          </a:p>
+        </p:txBody>
+      </p:sp>
+      <mc:AlternateContent xmlns:mc="http://schemas.openxmlformats.org/markup-compatibility/2006">
+        <mc:Choice xmlns:a14="http://schemas.microsoft.com/office/drawing/2010/main" Requires="a14">
+          <p:sp>
+            <p:nvSpPr>
+              <p:cNvPr id="3" name="Textplatzhalter 2">
+                <a:extLst>
+                  <a:ext uri="{FF2B5EF4-FFF2-40B4-BE49-F238E27FC236}">
+                    <a16:creationId xmlns:a16="http://schemas.microsoft.com/office/drawing/2014/main" id="{189BB41A-D9BD-E7B8-BEAB-F00DB43BA595}"/>
+                  </a:ext>
+                </a:extLst>
+              </p:cNvPr>
+              <p:cNvSpPr>
+                <a:spLocks noGrp="1"/>
+              </p:cNvSpPr>
+              <p:nvPr>
+                <p:ph type="body" sz="quarter" idx="14"/>
+              </p:nvPr>
+            </p:nvSpPr>
+            <p:spPr/>
+            <p:txBody>
+              <a:bodyPr/>
+              <a:lstStyle/>
+              <a:p>
+                <a:r>
+                  <a:rPr lang="en-US" noProof="0" dirty="0"/>
+                  <a:t>Evaluation metrics: </a:t>
+                </a:r>
+              </a:p>
+              <a:p>
+                <a:pPr lvl="1"/>
+                <a14:m>
+                  <m:oMath xmlns:m="http://schemas.openxmlformats.org/officeDocument/2006/math">
+                    <m:sSub>
+                      <m:sSubPr>
+                        <m:ctrlPr>
+                          <a:rPr lang="en-US" sz="1500" i="1" noProof="0">
+                            <a:latin typeface="Cambria Math" panose="02040503050406030204" pitchFamily="18" charset="0"/>
+                          </a:rPr>
+                        </m:ctrlPr>
+                      </m:sSubPr>
+                      <m:e>
+                        <m:r>
+                          <a:rPr lang="en-US" sz="1500" i="1" noProof="0">
+                            <a:latin typeface="Cambria Math" panose="02040503050406030204" pitchFamily="18" charset="0"/>
+                          </a:rPr>
+                          <m:t>𝑀</m:t>
+                        </m:r>
+                      </m:e>
+                      <m:sub>
+                        <m:r>
+                          <a:rPr lang="en-US" sz="1500" i="1" noProof="0">
+                            <a:latin typeface="Cambria Math" panose="02040503050406030204" pitchFamily="18" charset="0"/>
+                          </a:rPr>
+                          <m:t>𝑟𝑒𝑑𝑢𝑐𝑡𝑖𝑜𝑛</m:t>
+                        </m:r>
+                      </m:sub>
+                    </m:sSub>
+                  </m:oMath>
+                </a14:m>
+                <a:r>
+                  <a:rPr lang="en-US" sz="1500" noProof="0" dirty="0"/>
+                  <a:t>		</a:t>
+                </a:r>
+                <a14:m>
+                  <m:oMath xmlns:m="http://schemas.openxmlformats.org/officeDocument/2006/math">
+                    <m:r>
+                      <a:rPr lang="en-US" sz="1500" i="1" noProof="0">
+                        <a:latin typeface="Cambria Math" panose="02040503050406030204" pitchFamily="18" charset="0"/>
+                      </a:rPr>
+                      <m:t>𝑆𝑡𝑜𝑟𝑎𝑔𝑒</m:t>
+                    </m:r>
+                    <m:r>
+                      <a:rPr lang="en-US" sz="1500" i="1" noProof="0">
+                        <a:latin typeface="Cambria Math" panose="02040503050406030204" pitchFamily="18" charset="0"/>
+                      </a:rPr>
+                      <m:t> </m:t>
+                    </m:r>
+                    <m:r>
+                      <a:rPr lang="en-US" sz="1500" i="1" noProof="0">
+                        <a:latin typeface="Cambria Math" panose="02040503050406030204" pitchFamily="18" charset="0"/>
+                      </a:rPr>
+                      <m:t>𝑟𝑒𝑑𝑢𝑐𝑡𝑖𝑜𝑛</m:t>
+                    </m:r>
+                  </m:oMath>
+                </a14:m>
+                <a:r>
+                  <a:rPr lang="en-US" sz="1500" noProof="0" dirty="0"/>
+                  <a:t>		</a:t>
+                </a:r>
+                <a14:m>
+                  <m:oMath xmlns:m="http://schemas.openxmlformats.org/officeDocument/2006/math">
+                    <m:r>
+                      <a:rPr lang="en-US" sz="1500" noProof="0">
+                        <a:latin typeface="Cambria Math" panose="02040503050406030204" pitchFamily="18" charset="0"/>
+                      </a:rPr>
+                      <m:t>=</m:t>
+                    </m:r>
+                    <m:r>
+                      <a:rPr lang="en-US" sz="1500" i="1" noProof="0">
+                        <a:latin typeface="Cambria Math" panose="02040503050406030204" pitchFamily="18" charset="0"/>
+                      </a:rPr>
+                      <m:t>1 −</m:t>
+                    </m:r>
+                    <m:f>
+                      <m:fPr>
+                        <m:ctrlPr>
+                          <a:rPr lang="en-US" sz="1500" i="1" noProof="0">
+                            <a:latin typeface="Cambria Math" panose="02040503050406030204" pitchFamily="18" charset="0"/>
+                          </a:rPr>
+                        </m:ctrlPr>
+                      </m:fPr>
+                      <m:num>
+                        <m:sSup>
+                          <m:sSupPr>
+                            <m:ctrlPr>
+                              <a:rPr lang="en-US" sz="1500" i="1" noProof="0">
+                                <a:latin typeface="Cambria Math" panose="02040503050406030204" pitchFamily="18" charset="0"/>
+                              </a:rPr>
+                            </m:ctrlPr>
+                          </m:sSupPr>
+                          <m:e>
+                            <m:r>
+                              <a:rPr lang="en-US" sz="1500" i="1" noProof="0">
+                                <a:latin typeface="Cambria Math" panose="02040503050406030204" pitchFamily="18" charset="0"/>
+                              </a:rPr>
+                              <m:t>𝑀</m:t>
+                            </m:r>
+                          </m:e>
+                          <m:sup>
+                            <m:r>
+                              <a:rPr lang="en-US" sz="1500" i="1" noProof="0">
+                                <a:latin typeface="Cambria Math" panose="02040503050406030204" pitchFamily="18" charset="0"/>
+                              </a:rPr>
+                              <m:t>′</m:t>
+                            </m:r>
+                          </m:sup>
+                        </m:sSup>
+                      </m:num>
+                      <m:den>
+                        <m:r>
+                          <a:rPr lang="en-US" sz="1500" i="1" noProof="0">
+                            <a:latin typeface="Cambria Math" panose="02040503050406030204" pitchFamily="18" charset="0"/>
+                          </a:rPr>
+                          <m:t>𝑀</m:t>
+                        </m:r>
+                      </m:den>
+                    </m:f>
+                  </m:oMath>
+                </a14:m>
+                <a:endParaRPr lang="en-US" sz="1500" noProof="0" dirty="0"/>
+              </a:p>
+              <a:p>
+                <a:pPr lvl="1"/>
+                <a14:m>
+                  <m:oMath xmlns:m="http://schemas.openxmlformats.org/officeDocument/2006/math">
+                    <m:sSubSup>
+                      <m:sSubSupPr>
+                        <m:ctrlPr>
+                          <a:rPr lang="en-US" sz="1500" i="1" noProof="0">
+                            <a:latin typeface="Cambria Math" panose="02040503050406030204" pitchFamily="18" charset="0"/>
+                          </a:rPr>
+                        </m:ctrlPr>
+                      </m:sSubSupPr>
+                      <m:e>
+                        <m:r>
+                          <a:rPr lang="en-US" sz="1500" i="1" noProof="0">
+                            <a:latin typeface="Cambria Math" panose="02040503050406030204" pitchFamily="18" charset="0"/>
+                          </a:rPr>
+                          <m:t>𝑆</m:t>
+                        </m:r>
+                      </m:e>
+                      <m:sub>
+                        <m:r>
+                          <a:rPr lang="en-US" sz="1500" i="1" noProof="0">
+                            <a:latin typeface="Cambria Math" panose="02040503050406030204" pitchFamily="18" charset="0"/>
+                          </a:rPr>
+                          <m:t>𝑎𝑏𝑠𝑡𝑟𝑎𝑐𝑡𝑖𝑜𝑛</m:t>
+                        </m:r>
+                      </m:sub>
+                      <m:sup>
+                        <m:r>
+                          <a:rPr lang="en-US" sz="1500" i="1" noProof="0">
+                            <a:latin typeface="Cambria Math" panose="02040503050406030204" pitchFamily="18" charset="0"/>
+                          </a:rPr>
+                          <m:t>′</m:t>
+                        </m:r>
+                      </m:sup>
+                    </m:sSubSup>
+                  </m:oMath>
+                </a14:m>
+                <a:r>
+                  <a:rPr lang="en-US" sz="1500" noProof="0" dirty="0"/>
+                  <a:t>	</a:t>
+                </a:r>
+                <a14:m>
+                  <m:oMath xmlns:m="http://schemas.openxmlformats.org/officeDocument/2006/math">
+                    <m:r>
+                      <a:rPr lang="en-US" sz="1500" i="1" noProof="0">
+                        <a:latin typeface="Cambria Math" panose="02040503050406030204" pitchFamily="18" charset="0"/>
+                      </a:rPr>
+                      <m:t>𝑐h𝑖𝑙𝑑</m:t>
+                    </m:r>
+                    <m:r>
+                      <a:rPr lang="en-US" sz="1500" i="1" noProof="0">
+                        <a:latin typeface="Cambria Math" panose="02040503050406030204" pitchFamily="18" charset="0"/>
+                      </a:rPr>
+                      <m:t> </m:t>
+                    </m:r>
+                    <m:r>
+                      <a:rPr lang="en-US" sz="1500" i="1" noProof="0">
+                        <a:latin typeface="Cambria Math" panose="02040503050406030204" pitchFamily="18" charset="0"/>
+                      </a:rPr>
+                      <m:t>𝑎𝑏𝑠𝑡𝑟𝑎𝑐𝑡𝑖𝑜𝑛</m:t>
+                    </m:r>
+                    <m:r>
+                      <a:rPr lang="en-US" sz="1500" i="1" noProof="0">
+                        <a:latin typeface="Cambria Math" panose="02040503050406030204" pitchFamily="18" charset="0"/>
+                      </a:rPr>
+                      <m:t> </m:t>
+                    </m:r>
+                    <m:r>
+                      <a:rPr lang="en-US" sz="1500" i="1" noProof="0">
+                        <a:latin typeface="Cambria Math" panose="02040503050406030204" pitchFamily="18" charset="0"/>
+                      </a:rPr>
+                      <m:t>𝑟𝑎𝑡𝑖𝑜</m:t>
+                    </m:r>
+                  </m:oMath>
+                </a14:m>
+                <a:r>
+                  <a:rPr lang="en-US" sz="1500" noProof="0" dirty="0"/>
+                  <a:t>		</a:t>
+                </a:r>
+                <a14:m>
+                  <m:oMath xmlns:m="http://schemas.openxmlformats.org/officeDocument/2006/math">
+                    <m:r>
+                      <a:rPr lang="en-US" sz="1500" i="1" noProof="0">
+                        <a:latin typeface="Cambria Math" panose="02040503050406030204" pitchFamily="18" charset="0"/>
+                      </a:rPr>
+                      <m:t>=</m:t>
+                    </m:r>
+                    <m:f>
+                      <m:fPr>
+                        <m:ctrlPr>
+                          <a:rPr lang="en-US" sz="1500" i="1" noProof="0">
+                            <a:latin typeface="Cambria Math" panose="02040503050406030204" pitchFamily="18" charset="0"/>
+                          </a:rPr>
+                        </m:ctrlPr>
+                      </m:fPr>
+                      <m:num>
+                        <m:d>
+                          <m:dPr>
+                            <m:begChr m:val="|"/>
+                            <m:endChr m:val="|"/>
+                            <m:ctrlPr>
+                              <a:rPr lang="en-US" sz="1500" i="1" noProof="0">
+                                <a:latin typeface="Cambria Math" panose="02040503050406030204" pitchFamily="18" charset="0"/>
+                              </a:rPr>
+                            </m:ctrlPr>
+                          </m:dPr>
+                          <m:e>
+                            <m:r>
+                              <a:rPr lang="en-US" sz="1500" i="1" noProof="0">
+                                <a:latin typeface="Cambria Math" panose="02040503050406030204" pitchFamily="18" charset="0"/>
+                              </a:rPr>
+                              <m:t>𝐶</m:t>
+                            </m:r>
+                          </m:e>
+                        </m:d>
+                      </m:num>
+                      <m:den>
+                        <m:d>
+                          <m:dPr>
+                            <m:begChr m:val="|"/>
+                            <m:endChr m:val="|"/>
+                            <m:ctrlPr>
+                              <a:rPr lang="en-US" sz="1500" i="1" noProof="0">
+                                <a:latin typeface="Cambria Math" panose="02040503050406030204" pitchFamily="18" charset="0"/>
+                              </a:rPr>
+                            </m:ctrlPr>
+                          </m:dPr>
+                          <m:e>
+                            <m:r>
+                              <a:rPr lang="en-US" sz="1500" i="1" noProof="0">
+                                <a:latin typeface="Cambria Math" panose="02040503050406030204" pitchFamily="18" charset="0"/>
+                              </a:rPr>
+                              <m:t>𝑆</m:t>
+                            </m:r>
+                          </m:e>
+                        </m:d>
+                      </m:den>
+                    </m:f>
+                  </m:oMath>
+                </a14:m>
+                <a:endParaRPr lang="en-US" sz="1500" noProof="0" dirty="0"/>
+              </a:p>
+              <a:p>
+                <a:pPr lvl="1"/>
+                <a14:m>
+                  <m:oMath xmlns:m="http://schemas.openxmlformats.org/officeDocument/2006/math">
+                    <m:sSub>
+                      <m:sSubPr>
+                        <m:ctrlPr>
+                          <a:rPr lang="en-US" sz="1500" i="1" noProof="0">
+                            <a:latin typeface="Cambria Math" panose="02040503050406030204" pitchFamily="18" charset="0"/>
+                          </a:rPr>
+                        </m:ctrlPr>
+                      </m:sSubPr>
+                      <m:e>
+                        <m:r>
+                          <a:rPr lang="en-US" sz="1500" i="1" noProof="0">
+                            <a:latin typeface="Cambria Math" panose="02040503050406030204" pitchFamily="18" charset="0"/>
+                          </a:rPr>
+                          <m:t>𝑃</m:t>
+                        </m:r>
+                      </m:e>
+                      <m:sub>
+                        <m:r>
+                          <a:rPr lang="en-US" sz="1500" i="1" noProof="0">
+                            <a:latin typeface="Cambria Math" panose="02040503050406030204" pitchFamily="18" charset="0"/>
+                          </a:rPr>
+                          <m:t>𝐶</m:t>
+                        </m:r>
+                      </m:sub>
+                    </m:sSub>
+                  </m:oMath>
+                </a14:m>
+                <a:r>
+                  <a:rPr lang="en-US" sz="1500" noProof="0" dirty="0"/>
+                  <a:t>		</a:t>
+                </a:r>
+                <a14:m>
+                  <m:oMath xmlns:m="http://schemas.openxmlformats.org/officeDocument/2006/math">
+                    <m:r>
+                      <a:rPr lang="en-US" sz="1500" i="1" noProof="0">
+                        <a:latin typeface="Cambria Math" panose="02040503050406030204" pitchFamily="18" charset="0"/>
+                      </a:rPr>
+                      <m:t>𝑐h𝑖𝑙𝑑</m:t>
+                    </m:r>
+                    <m:r>
+                      <a:rPr lang="en-US" sz="1500" i="1" noProof="0">
+                        <a:latin typeface="Cambria Math" panose="02040503050406030204" pitchFamily="18" charset="0"/>
+                      </a:rPr>
+                      <m:t> </m:t>
+                    </m:r>
+                    <m:r>
+                      <a:rPr lang="en-US" sz="1500" i="1" noProof="0">
+                        <a:latin typeface="Cambria Math" panose="02040503050406030204" pitchFamily="18" charset="0"/>
+                      </a:rPr>
+                      <m:t>𝑝𝑒𝑟</m:t>
+                    </m:r>
+                    <m:r>
+                      <a:rPr lang="en-US" sz="1500" i="1" noProof="0">
+                        <a:latin typeface="Cambria Math" panose="02040503050406030204" pitchFamily="18" charset="0"/>
+                      </a:rPr>
+                      <m:t> </m:t>
+                    </m:r>
+                    <m:r>
+                      <a:rPr lang="en-US" sz="1500" i="1" noProof="0">
+                        <a:latin typeface="Cambria Math" panose="02040503050406030204" pitchFamily="18" charset="0"/>
+                      </a:rPr>
+                      <m:t>𝑝𝑎𝑟𝑒𝑛𝑡</m:t>
+                    </m:r>
+                    <m:r>
+                      <a:rPr lang="en-US" sz="1500" i="1" noProof="0">
+                        <a:latin typeface="Cambria Math" panose="02040503050406030204" pitchFamily="18" charset="0"/>
+                      </a:rPr>
+                      <m:t> </m:t>
+                    </m:r>
+                    <m:r>
+                      <a:rPr lang="en-US" sz="1500" i="1" noProof="0">
+                        <a:latin typeface="Cambria Math" panose="02040503050406030204" pitchFamily="18" charset="0"/>
+                      </a:rPr>
+                      <m:t>𝑟𝑎𝑡𝑖𝑜</m:t>
+                    </m:r>
+                  </m:oMath>
+                </a14:m>
+                <a:r>
+                  <a:rPr lang="en-US" sz="1500" noProof="0" dirty="0"/>
+                  <a:t>		</a:t>
+                </a:r>
+                <a14:m>
+                  <m:oMath xmlns:m="http://schemas.openxmlformats.org/officeDocument/2006/math">
+                    <m:r>
+                      <a:rPr lang="en-US" sz="1500" i="1" noProof="0">
+                        <a:latin typeface="Cambria Math" panose="02040503050406030204" pitchFamily="18" charset="0"/>
+                      </a:rPr>
+                      <m:t>=</m:t>
+                    </m:r>
+                    <m:f>
+                      <m:fPr>
+                        <m:ctrlPr>
+                          <a:rPr lang="en-US" sz="1500" i="1" noProof="0">
+                            <a:latin typeface="Cambria Math" panose="02040503050406030204" pitchFamily="18" charset="0"/>
+                          </a:rPr>
+                        </m:ctrlPr>
+                      </m:fPr>
+                      <m:num>
+                        <m:d>
+                          <m:dPr>
+                            <m:begChr m:val="|"/>
+                            <m:endChr m:val="|"/>
+                            <m:ctrlPr>
+                              <a:rPr lang="en-US" sz="1500" i="1" noProof="0">
+                                <a:latin typeface="Cambria Math" panose="02040503050406030204" pitchFamily="18" charset="0"/>
+                              </a:rPr>
+                            </m:ctrlPr>
+                          </m:dPr>
+                          <m:e>
+                            <m:r>
+                              <a:rPr lang="en-US" sz="1500" i="1" noProof="0">
+                                <a:latin typeface="Cambria Math" panose="02040503050406030204" pitchFamily="18" charset="0"/>
+                              </a:rPr>
+                              <m:t>𝐶</m:t>
+                            </m:r>
+                          </m:e>
+                        </m:d>
+                      </m:num>
+                      <m:den>
+                        <m:d>
+                          <m:dPr>
+                            <m:begChr m:val="|"/>
+                            <m:endChr m:val="|"/>
+                            <m:ctrlPr>
+                              <a:rPr lang="en-US" sz="1500" i="1" noProof="0">
+                                <a:latin typeface="Cambria Math" panose="02040503050406030204" pitchFamily="18" charset="0"/>
+                              </a:rPr>
+                            </m:ctrlPr>
+                          </m:dPr>
+                          <m:e>
+                            <m:r>
+                              <a:rPr lang="en-US" sz="1500" i="1" noProof="0">
+                                <a:latin typeface="Cambria Math" panose="02040503050406030204" pitchFamily="18" charset="0"/>
+                              </a:rPr>
+                              <m:t>𝑃</m:t>
+                            </m:r>
+                          </m:e>
+                        </m:d>
+                      </m:den>
+                    </m:f>
+                  </m:oMath>
+                </a14:m>
+                <a:endParaRPr lang="en-US" sz="1500" noProof="0" dirty="0"/>
+              </a:p>
+              <a:p>
+                <a:pPr lvl="1"/>
+                <a14:m>
+                  <m:oMath xmlns:m="http://schemas.openxmlformats.org/officeDocument/2006/math">
+                    <m:sSub>
+                      <m:sSubPr>
+                        <m:ctrlPr>
+                          <a:rPr lang="en-US" sz="1500" i="1" noProof="0">
+                            <a:latin typeface="Cambria Math" panose="02040503050406030204" pitchFamily="18" charset="0"/>
+                          </a:rPr>
+                        </m:ctrlPr>
+                      </m:sSubPr>
+                      <m:e>
+                        <m:r>
+                          <a:rPr lang="en-US" sz="1500" i="1" noProof="0">
+                            <a:latin typeface="Cambria Math" panose="02040503050406030204" pitchFamily="18" charset="0"/>
+                          </a:rPr>
+                          <m:t>𝜋</m:t>
+                        </m:r>
+                      </m:e>
+                      <m:sub>
+                        <m:r>
+                          <a:rPr lang="en-US" sz="1500" i="1" noProof="0">
+                            <a:latin typeface="Cambria Math" panose="02040503050406030204" pitchFamily="18" charset="0"/>
+                          </a:rPr>
+                          <m:t>𝑎𝑔𝑟𝑒𝑒𝑚𝑒𝑛𝑡</m:t>
+                        </m:r>
+                      </m:sub>
+                    </m:sSub>
+                  </m:oMath>
+                </a14:m>
+                <a:r>
+                  <a:rPr lang="en-US" sz="1500" noProof="0" dirty="0"/>
+                  <a:t>	</a:t>
+                </a:r>
+                <a14:m>
+                  <m:oMath xmlns:m="http://schemas.openxmlformats.org/officeDocument/2006/math">
+                    <m:r>
+                      <a:rPr lang="en-US" sz="1500" i="1" noProof="0">
+                        <a:latin typeface="Cambria Math" panose="02040503050406030204" pitchFamily="18" charset="0"/>
+                      </a:rPr>
+                      <m:t>𝑃𝑜𝑙𝑖𝑐𝑦</m:t>
+                    </m:r>
+                    <m:r>
+                      <a:rPr lang="en-US" sz="1500" i="1" noProof="0">
+                        <a:latin typeface="Cambria Math" panose="02040503050406030204" pitchFamily="18" charset="0"/>
+                      </a:rPr>
+                      <m:t> </m:t>
+                    </m:r>
+                    <m:r>
+                      <a:rPr lang="en-US" sz="1500" i="1" noProof="0">
+                        <a:latin typeface="Cambria Math" panose="02040503050406030204" pitchFamily="18" charset="0"/>
+                      </a:rPr>
+                      <m:t>𝑎𝑔𝑟𝑒𝑒𝑚𝑒𝑛𝑡</m:t>
+                    </m:r>
+                  </m:oMath>
+                </a14:m>
+                <a:endParaRPr lang="en-US" sz="1500" noProof="0" dirty="0"/>
+              </a:p>
+              <a:p>
+                <a:pPr lvl="1"/>
+                <a14:m>
+                  <m:oMath xmlns:m="http://schemas.openxmlformats.org/officeDocument/2006/math">
+                    <m:sSub>
+                      <m:sSubPr>
+                        <m:ctrlPr>
+                          <a:rPr lang="en-US" sz="1500" i="1" noProof="0">
+                            <a:latin typeface="Cambria Math" panose="02040503050406030204" pitchFamily="18" charset="0"/>
+                          </a:rPr>
+                        </m:ctrlPr>
+                      </m:sSubPr>
+                      <m:e>
+                        <m:r>
+                          <a:rPr lang="en-US" sz="1500" i="1" noProof="0">
+                            <a:latin typeface="Cambria Math" panose="02040503050406030204" pitchFamily="18" charset="0"/>
+                          </a:rPr>
+                          <m:t>𝑄</m:t>
+                        </m:r>
+                      </m:e>
+                      <m:sub>
+                        <m:r>
+                          <a:rPr lang="en-US" sz="1500" i="1" noProof="0">
+                            <a:latin typeface="Cambria Math" panose="02040503050406030204" pitchFamily="18" charset="0"/>
+                          </a:rPr>
+                          <m:t>𝑒𝑟𝑟𝑜𝑟</m:t>
+                        </m:r>
+                      </m:sub>
+                    </m:sSub>
+                  </m:oMath>
+                </a14:m>
+                <a:r>
+                  <a:rPr lang="en-US" sz="1500" noProof="0" dirty="0"/>
+                  <a:t>		</a:t>
+                </a:r>
+                <a14:m>
+                  <m:oMath xmlns:m="http://schemas.openxmlformats.org/officeDocument/2006/math">
+                    <m:r>
+                      <a:rPr lang="en-US" sz="1500" i="1" noProof="0">
+                        <a:latin typeface="Cambria Math" panose="02040503050406030204" pitchFamily="18" charset="0"/>
+                      </a:rPr>
+                      <m:t>𝑄</m:t>
+                    </m:r>
+                    <m:r>
+                      <a:rPr lang="en-US" sz="1500" i="1" noProof="0">
+                        <a:latin typeface="Cambria Math" panose="02040503050406030204" pitchFamily="18" charset="0"/>
+                      </a:rPr>
+                      <m:t>−</m:t>
+                    </m:r>
+                    <m:r>
+                      <a:rPr lang="en-US" sz="1500" i="1" noProof="0">
+                        <a:latin typeface="Cambria Math" panose="02040503050406030204" pitchFamily="18" charset="0"/>
+                      </a:rPr>
+                      <m:t>𝑣𝑎𝑙𝑢𝑒</m:t>
+                    </m:r>
+                    <m:r>
+                      <a:rPr lang="en-US" sz="1500" i="1" noProof="0">
+                        <a:latin typeface="Cambria Math" panose="02040503050406030204" pitchFamily="18" charset="0"/>
+                      </a:rPr>
+                      <m:t> </m:t>
+                    </m:r>
+                    <m:r>
+                      <a:rPr lang="en-US" sz="1500" i="1" noProof="0">
+                        <a:latin typeface="Cambria Math" panose="02040503050406030204" pitchFamily="18" charset="0"/>
+                      </a:rPr>
+                      <m:t>𝑒𝑟𝑟𝑜𝑟</m:t>
+                    </m:r>
+                  </m:oMath>
+                </a14:m>
+                <a:endParaRPr lang="en-US" sz="1500" noProof="0" dirty="0"/>
+              </a:p>
+              <a:p>
+                <a:pPr lvl="1"/>
+                <a14:m>
+                  <m:oMath xmlns:m="http://schemas.openxmlformats.org/officeDocument/2006/math">
+                    <m:sSub>
+                      <m:sSubPr>
+                        <m:ctrlPr>
+                          <a:rPr lang="en-US" sz="1500" i="1" noProof="0">
+                            <a:latin typeface="Cambria Math" panose="02040503050406030204" pitchFamily="18" charset="0"/>
+                          </a:rPr>
+                        </m:ctrlPr>
+                      </m:sSubPr>
+                      <m:e>
+                        <m:r>
+                          <a:rPr lang="en-US" sz="1500" i="1" noProof="0">
+                            <a:latin typeface="Cambria Math" panose="02040503050406030204" pitchFamily="18" charset="0"/>
+                          </a:rPr>
+                          <m:t>𝑇</m:t>
+                        </m:r>
+                      </m:e>
+                      <m:sub>
+                        <m:r>
+                          <a:rPr lang="en-US" sz="1500" i="1" noProof="0">
+                            <a:latin typeface="Cambria Math" panose="02040503050406030204" pitchFamily="18" charset="0"/>
+                          </a:rPr>
+                          <m:t>𝑜𝑣𝑒𝑟h𝑒𝑎𝑑</m:t>
+                        </m:r>
+                      </m:sub>
+                    </m:sSub>
+                  </m:oMath>
+                </a14:m>
+                <a:r>
+                  <a:rPr lang="en-US" sz="1500" noProof="0" dirty="0"/>
+                  <a:t>		</a:t>
+                </a:r>
+                <a14:m>
+                  <m:oMath xmlns:m="http://schemas.openxmlformats.org/officeDocument/2006/math">
+                    <m:r>
+                      <a:rPr lang="en-US" sz="1500" i="1" noProof="0">
+                        <a:latin typeface="Cambria Math" panose="02040503050406030204" pitchFamily="18" charset="0"/>
+                      </a:rPr>
+                      <m:t>𝑅𝑢𝑛𝑡𝑖𝑚𝑒</m:t>
+                    </m:r>
+                    <m:r>
+                      <a:rPr lang="en-US" sz="1500" i="1" noProof="0">
+                        <a:latin typeface="Cambria Math" panose="02040503050406030204" pitchFamily="18" charset="0"/>
+                      </a:rPr>
+                      <m:t> </m:t>
+                    </m:r>
+                    <m:r>
+                      <a:rPr lang="en-US" sz="1500" i="1" noProof="0">
+                        <a:latin typeface="Cambria Math" panose="02040503050406030204" pitchFamily="18" charset="0"/>
+                      </a:rPr>
+                      <m:t>𝑜𝑣𝑒𝑟h𝑒𝑎𝑑</m:t>
+                    </m:r>
+                  </m:oMath>
+                </a14:m>
+                <a:r>
+                  <a:rPr lang="en-US" sz="1500" noProof="0" dirty="0"/>
+                  <a:t>		</a:t>
+                </a:r>
+                <a14:m>
+                  <m:oMath xmlns:m="http://schemas.openxmlformats.org/officeDocument/2006/math">
+                    <m:r>
+                      <a:rPr lang="en-US" sz="1500" i="1" noProof="0">
+                        <a:latin typeface="Cambria Math" panose="02040503050406030204" pitchFamily="18" charset="0"/>
+                      </a:rPr>
+                      <m:t>=</m:t>
+                    </m:r>
+                    <m:sSub>
+                      <m:sSubPr>
+                        <m:ctrlPr>
+                          <a:rPr lang="en-US" sz="1500" i="1" noProof="0">
+                            <a:latin typeface="Cambria Math" panose="02040503050406030204" pitchFamily="18" charset="0"/>
+                          </a:rPr>
+                        </m:ctrlPr>
+                      </m:sSubPr>
+                      <m:e>
+                        <m:r>
+                          <a:rPr lang="en-US" sz="1500" i="1" noProof="0">
+                            <a:latin typeface="Cambria Math" panose="02040503050406030204" pitchFamily="18" charset="0"/>
+                          </a:rPr>
+                          <m:t>𝑇</m:t>
+                        </m:r>
+                      </m:e>
+                      <m:sub>
+                        <m:r>
+                          <a:rPr lang="en-US" sz="1500" i="1" noProof="0">
+                            <a:latin typeface="Cambria Math" panose="02040503050406030204" pitchFamily="18" charset="0"/>
+                          </a:rPr>
+                          <m:t>𝑠𝑝𝑙𝑖𝑡</m:t>
+                        </m:r>
+                      </m:sub>
+                    </m:sSub>
+                    <m:r>
+                      <a:rPr lang="en-US" sz="1500" i="1" noProof="0">
+                        <a:latin typeface="Cambria Math" panose="02040503050406030204" pitchFamily="18" charset="0"/>
+                      </a:rPr>
+                      <m:t>/</m:t>
+                    </m:r>
+                    <m:sSub>
+                      <m:sSubPr>
+                        <m:ctrlPr>
+                          <a:rPr lang="en-US" sz="1500" i="1" noProof="0">
+                            <a:latin typeface="Cambria Math" panose="02040503050406030204" pitchFamily="18" charset="0"/>
+                          </a:rPr>
+                        </m:ctrlPr>
+                      </m:sSubPr>
+                      <m:e>
+                        <m:r>
+                          <a:rPr lang="en-US" sz="1500" i="1" noProof="0">
+                            <a:latin typeface="Cambria Math" panose="02040503050406030204" pitchFamily="18" charset="0"/>
+                          </a:rPr>
+                          <m:t>𝑇</m:t>
+                        </m:r>
+                      </m:e>
+                      <m:sub>
+                        <m:r>
+                          <a:rPr lang="en-US" sz="1500" i="1" noProof="0">
+                            <a:latin typeface="Cambria Math" panose="02040503050406030204" pitchFamily="18" charset="0"/>
+                          </a:rPr>
+                          <m:t>𝑟𝑒𝑐𝑜𝑛𝑠𝑡𝑟𝑢𝑐𝑡𝑒𝑑</m:t>
+                        </m:r>
+                      </m:sub>
+                    </m:sSub>
+                  </m:oMath>
+                </a14:m>
+                <a:endParaRPr lang="en-US" sz="1500" noProof="0" dirty="0"/>
+              </a:p>
+              <a:p>
+                <a:pPr lvl="1"/>
+                <a14:m>
+                  <m:oMath xmlns:m="http://schemas.openxmlformats.org/officeDocument/2006/math">
+                    <m:sSub>
+                      <m:sSubPr>
+                        <m:ctrlPr>
+                          <a:rPr lang="en-US" sz="1500" i="1" noProof="0">
+                            <a:latin typeface="Cambria Math" panose="02040503050406030204" pitchFamily="18" charset="0"/>
+                          </a:rPr>
+                        </m:ctrlPr>
+                      </m:sSubPr>
+                      <m:e>
+                        <m:r>
+                          <a:rPr lang="en-US" sz="1500" i="1" noProof="0">
+                            <a:latin typeface="Cambria Math" panose="02040503050406030204" pitchFamily="18" charset="0"/>
+                          </a:rPr>
+                          <m:t>𝑀</m:t>
+                        </m:r>
+                      </m:e>
+                      <m:sub>
+                        <m:r>
+                          <a:rPr lang="en-US" sz="1500" i="1" noProof="0">
+                            <a:latin typeface="Cambria Math" panose="02040503050406030204" pitchFamily="18" charset="0"/>
+                          </a:rPr>
+                          <m:t>𝑜𝑣𝑒𝑟h𝑒𝑎𝑑</m:t>
+                        </m:r>
+                      </m:sub>
+                    </m:sSub>
+                  </m:oMath>
+                </a14:m>
+                <a:r>
+                  <a:rPr lang="en-US" sz="1500" noProof="0" dirty="0"/>
+                  <a:t> 	</a:t>
+                </a:r>
+                <a14:m>
+                  <m:oMath xmlns:m="http://schemas.openxmlformats.org/officeDocument/2006/math">
+                    <m:r>
+                      <a:rPr lang="en-US" sz="1500" i="1" noProof="0">
+                        <a:latin typeface="Cambria Math" panose="02040503050406030204" pitchFamily="18" charset="0"/>
+                      </a:rPr>
+                      <m:t>𝑀𝑒𝑚𝑜𝑟𝑦</m:t>
+                    </m:r>
+                    <m:r>
+                      <a:rPr lang="en-US" sz="1500" i="1" noProof="0">
+                        <a:latin typeface="Cambria Math" panose="02040503050406030204" pitchFamily="18" charset="0"/>
+                      </a:rPr>
+                      <m:t> </m:t>
+                    </m:r>
+                    <m:r>
+                      <a:rPr lang="en-US" sz="1500" i="1" noProof="0">
+                        <a:latin typeface="Cambria Math" panose="02040503050406030204" pitchFamily="18" charset="0"/>
+                      </a:rPr>
+                      <m:t>𝑜𝑏𝑒𝑟h𝑒𝑎𝑑</m:t>
+                    </m:r>
+                  </m:oMath>
+                </a14:m>
+                <a:r>
+                  <a:rPr lang="en-US" sz="1500" noProof="0" dirty="0"/>
+                  <a:t>		</a:t>
+                </a:r>
+                <a14:m>
+                  <m:oMath xmlns:m="http://schemas.openxmlformats.org/officeDocument/2006/math">
+                    <m:r>
+                      <a:rPr lang="en-US" sz="1500" i="1" noProof="0">
+                        <a:latin typeface="Cambria Math" panose="02040503050406030204" pitchFamily="18" charset="0"/>
+                      </a:rPr>
+                      <m:t>=</m:t>
+                    </m:r>
+                    <m:f>
+                      <m:fPr>
+                        <m:ctrlPr>
+                          <a:rPr lang="en-US" sz="1500" i="1" noProof="0">
+                            <a:latin typeface="Cambria Math" panose="02040503050406030204" pitchFamily="18" charset="0"/>
+                          </a:rPr>
+                        </m:ctrlPr>
+                      </m:fPr>
+                      <m:num>
+                        <m:sSub>
+                          <m:sSubPr>
+                            <m:ctrlPr>
+                              <a:rPr lang="en-US" sz="1500" i="1" noProof="0">
+                                <a:latin typeface="Cambria Math" panose="02040503050406030204" pitchFamily="18" charset="0"/>
+                              </a:rPr>
+                            </m:ctrlPr>
+                          </m:sSubPr>
+                          <m:e>
+                            <m:r>
+                              <a:rPr lang="en-US" sz="1500" i="1" noProof="0">
+                                <a:latin typeface="Cambria Math" panose="02040503050406030204" pitchFamily="18" charset="0"/>
+                              </a:rPr>
+                              <m:t>𝑀</m:t>
+                            </m:r>
+                          </m:e>
+                          <m:sub>
+                            <m:r>
+                              <a:rPr lang="en-US" sz="1500" i="1" noProof="0">
+                                <a:latin typeface="Cambria Math" panose="02040503050406030204" pitchFamily="18" charset="0"/>
+                              </a:rPr>
+                              <m:t>𝑝𝑟𝑜𝑐𝑒𝑠𝑠</m:t>
+                            </m:r>
+                          </m:sub>
+                        </m:sSub>
+                      </m:num>
+                      <m:den>
+                        <m:sSub>
+                          <m:sSubPr>
+                            <m:ctrlPr>
+                              <a:rPr lang="en-US" sz="1500" i="1" noProof="0">
+                                <a:latin typeface="Cambria Math" panose="02040503050406030204" pitchFamily="18" charset="0"/>
+                              </a:rPr>
+                            </m:ctrlPr>
+                          </m:sSubPr>
+                          <m:e>
+                            <m:r>
+                              <a:rPr lang="en-US" sz="1500" i="1" noProof="0">
+                                <a:latin typeface="Cambria Math" panose="02040503050406030204" pitchFamily="18" charset="0"/>
+                              </a:rPr>
+                              <m:t>𝑀</m:t>
+                            </m:r>
+                          </m:e>
+                          <m:sub>
+                            <m:r>
+                              <a:rPr lang="en-US" sz="1500" i="1" noProof="0">
+                                <a:latin typeface="Cambria Math" panose="02040503050406030204" pitchFamily="18" charset="0"/>
+                              </a:rPr>
+                              <m:t>𝑛𝑜𝑟𝑚𝑎𝑙</m:t>
+                            </m:r>
+                          </m:sub>
+                        </m:sSub>
+                      </m:den>
+                    </m:f>
+                  </m:oMath>
+                </a14:m>
+                <a:endParaRPr lang="en-US" sz="1500" noProof="0" dirty="0"/>
+              </a:p>
+              <a:p>
+                <a:pPr lvl="1"/>
+                <a14:m>
+                  <m:oMath xmlns:m="http://schemas.openxmlformats.org/officeDocument/2006/math">
+                    <m:sSub>
+                      <m:sSubPr>
+                        <m:ctrlPr>
+                          <a:rPr lang="en-US" sz="1500" i="1" noProof="0">
+                            <a:latin typeface="Cambria Math" panose="02040503050406030204" pitchFamily="18" charset="0"/>
+                          </a:rPr>
+                        </m:ctrlPr>
+                      </m:sSubPr>
+                      <m:e>
+                        <m:r>
+                          <a:rPr lang="en-US" sz="1500" i="1" noProof="0">
+                            <a:latin typeface="Cambria Math" panose="02040503050406030204" pitchFamily="18" charset="0"/>
+                          </a:rPr>
+                          <m:t>𝑄</m:t>
+                        </m:r>
+                      </m:e>
+                      <m:sub>
+                        <m:r>
+                          <a:rPr lang="en-US" sz="1500" i="1" noProof="0">
+                            <a:latin typeface="Cambria Math" panose="02040503050406030204" pitchFamily="18" charset="0"/>
+                          </a:rPr>
+                          <m:t>𝑎𝑣𝑒𝑟𝑎𝑔𝑒</m:t>
+                        </m:r>
+                      </m:sub>
+                    </m:sSub>
+                  </m:oMath>
+                </a14:m>
+                <a:r>
+                  <a:rPr lang="en-US" sz="1500" noProof="0" dirty="0"/>
+                  <a:t>		</a:t>
+                </a:r>
+                <a14:m>
+                  <m:oMath xmlns:m="http://schemas.openxmlformats.org/officeDocument/2006/math">
+                    <m:r>
+                      <a:rPr lang="en-US" sz="1500" i="1" noProof="0">
+                        <a:latin typeface="Cambria Math" panose="02040503050406030204" pitchFamily="18" charset="0"/>
+                      </a:rPr>
+                      <m:t>𝑏𝑒𝑠𝑡</m:t>
+                    </m:r>
+                    <m:r>
+                      <a:rPr lang="en-US" sz="1500" i="1" noProof="0">
+                        <a:latin typeface="Cambria Math" panose="02040503050406030204" pitchFamily="18" charset="0"/>
+                      </a:rPr>
+                      <m:t> </m:t>
+                    </m:r>
+                    <m:r>
+                      <a:rPr lang="en-US" sz="1500" i="1" noProof="0">
+                        <a:latin typeface="Cambria Math" panose="02040503050406030204" pitchFamily="18" charset="0"/>
+                      </a:rPr>
+                      <m:t>𝑎𝑣𝑒𝑟𝑎𝑔𝑒</m:t>
+                    </m:r>
+                    <m:r>
+                      <a:rPr lang="en-US" sz="1500" i="1" noProof="0">
+                        <a:latin typeface="Cambria Math" panose="02040503050406030204" pitchFamily="18" charset="0"/>
+                      </a:rPr>
+                      <m:t> </m:t>
+                    </m:r>
+                    <m:r>
+                      <a:rPr lang="en-US" sz="1500" i="1" noProof="0">
+                        <a:latin typeface="Cambria Math" panose="02040503050406030204" pitchFamily="18" charset="0"/>
+                      </a:rPr>
+                      <m:t>𝑄</m:t>
+                    </m:r>
+                    <m:r>
+                      <a:rPr lang="en-US" sz="1500" i="1" noProof="0">
+                        <a:latin typeface="Cambria Math" panose="02040503050406030204" pitchFamily="18" charset="0"/>
+                      </a:rPr>
+                      <m:t>−</m:t>
+                    </m:r>
+                    <m:r>
+                      <a:rPr lang="en-US" sz="1500" i="1" noProof="0">
+                        <a:latin typeface="Cambria Math" panose="02040503050406030204" pitchFamily="18" charset="0"/>
+                      </a:rPr>
+                      <m:t>𝑡𝑎𝑏𝑙𝑒</m:t>
+                    </m:r>
+                  </m:oMath>
+                </a14:m>
+                <a:r>
+                  <a:rPr lang="en-US" sz="1500" noProof="0" dirty="0"/>
+                  <a:t>		</a:t>
+                </a:r>
+              </a:p>
+              <a:p>
+                <a:endParaRPr lang="en-US" noProof="0" dirty="0"/>
+              </a:p>
+            </p:txBody>
+          </p:sp>
+        </mc:Choice>
+        <mc:Fallback>
+          <p:sp>
+            <p:nvSpPr>
+              <p:cNvPr id="3" name="Textplatzhalter 2">
+                <a:extLst>
+                  <a:ext uri="{FF2B5EF4-FFF2-40B4-BE49-F238E27FC236}">
+                    <a16:creationId xmlns:a16="http://schemas.microsoft.com/office/drawing/2014/main" id="{189BB41A-D9BD-E7B8-BEAB-F00DB43BA595}"/>
+                  </a:ext>
+                </a:extLst>
+              </p:cNvPr>
+              <p:cNvSpPr>
+                <a:spLocks noGrp="1" noRot="1" noChangeAspect="1" noMove="1" noResize="1" noEditPoints="1" noAdjustHandles="1" noChangeArrowheads="1" noChangeShapeType="1" noTextEdit="1"/>
+              </p:cNvSpPr>
+              <p:nvPr>
+                <p:ph type="body" sz="quarter" idx="14"/>
+              </p:nvPr>
+            </p:nvSpPr>
+            <p:spPr>
+              <a:blipFill>
+                <a:blip r:embed="rId2"/>
+                <a:stretch>
+                  <a:fillRect l="-695" t="-1958"/>
+                </a:stretch>
+              </a:blipFill>
+            </p:spPr>
+            <p:txBody>
+              <a:bodyPr/>
+              <a:lstStyle/>
+              <a:p>
+                <a:r>
+                  <a:rPr lang="de-AT">
+                    <a:noFill/>
+                  </a:rPr>
+                  <a:t> </a:t>
+                </a:r>
+              </a:p>
+            </p:txBody>
+          </p:sp>
+        </mc:Fallback>
+      </mc:AlternateContent>
+      <p:sp>
+        <p:nvSpPr>
+          <p:cNvPr id="4" name="Fußzeilenplatzhalter 3">
+            <a:extLst>
+              <a:ext uri="{FF2B5EF4-FFF2-40B4-BE49-F238E27FC236}">
+                <a16:creationId xmlns:a16="http://schemas.microsoft.com/office/drawing/2014/main" id="{01BDA3D1-754D-AC97-5FEB-24D5168541B1}"/>
+              </a:ext>
+            </a:extLst>
+          </p:cNvPr>
+          <p:cNvSpPr>
+            <a:spLocks noGrp="1"/>
+          </p:cNvSpPr>
+          <p:nvPr>
+            <p:ph type="ftr" sz="quarter" idx="12"/>
+          </p:nvPr>
+        </p:nvSpPr>
+        <p:spPr/>
+        <p:txBody>
+          <a:bodyPr/>
+          <a:lstStyle/>
+          <a:p>
+            <a:r>
+              <a:rPr lang="en-US" noProof="0" dirty="0"/>
+              <a:t>Root-State and Child-State Q-table Abstraction | Stefan Werner | 31.05.2026</a:t>
+            </a:r>
+          </a:p>
+        </p:txBody>
+      </p:sp>
+      <p:sp>
+        <p:nvSpPr>
+          <p:cNvPr id="5" name="Foliennummernplatzhalter 4">
+            <a:extLst>
+              <a:ext uri="{FF2B5EF4-FFF2-40B4-BE49-F238E27FC236}">
+                <a16:creationId xmlns:a16="http://schemas.microsoft.com/office/drawing/2014/main" id="{44CF3C22-0A48-6E98-43CD-20AD8C66FB3D}"/>
+              </a:ext>
+            </a:extLst>
+          </p:cNvPr>
+          <p:cNvSpPr>
+            <a:spLocks noGrp="1"/>
+          </p:cNvSpPr>
+          <p:nvPr>
+            <p:ph type="sldNum" sz="quarter" idx="13"/>
+          </p:nvPr>
+        </p:nvSpPr>
+        <p:spPr/>
+        <p:txBody>
+          <a:bodyPr/>
+          <a:lstStyle/>
+          <a:p>
+            <a:fld id="{9C057DB4-583E-41A7-BD94-987342018C17}" type="slidenum">
+              <a:rPr lang="en-US" noProof="0" smtClean="0"/>
+              <a:pPr/>
+              <a:t>8</a:t>
+            </a:fld>
+            <a:endParaRPr lang="en-US" noProof="0" dirty="0"/>
+          </a:p>
+        </p:txBody>
+      </p:sp>
+    </p:spTree>
+    <p:extLst>
+      <p:ext uri="{BB962C8B-B14F-4D97-AF65-F5344CB8AC3E}">
+        <p14:creationId xmlns:p14="http://schemas.microsoft.com/office/powerpoint/2010/main" val="400737529"/>
+      </p:ext>
+    </p:extLst>
+  </p:cSld>
+  <p:clrMapOvr>
+    <a:masterClrMapping/>
+  </p:clrMapOvr>
+</p:sld>
+</file>
+
+<file path=ppt/slides/slide9.xml><?xml version="1.0" encoding="utf-8"?>
+<p:sld xmlns:a="http://schemas.openxmlformats.org/drawingml/2006/main" xmlns:r="http://schemas.openxmlformats.org/officeDocument/2006/relationships" xmlns:p="http://schemas.openxmlformats.org/presentationml/2006/main">
+  <p:cSld>
+    <p:spTree>
+      <p:nvGrpSpPr>
+        <p:cNvPr id="1" name=""/>
+        <p:cNvGrpSpPr/>
+        <p:nvPr/>
+      </p:nvGrpSpPr>
+      <p:grpSpPr>
+        <a:xfrm>
+          <a:off x="0" y="0"/>
+          <a:ext cx="0" cy="0"/>
+          <a:chOff x="0" y="0"/>
+          <a:chExt cx="0" cy="0"/>
+        </a:xfrm>
+      </p:grpSpPr>
+      <p:sp>
+        <p:nvSpPr>
+          <p:cNvPr id="2" name="Titel 1">
+            <a:extLst>
+              <a:ext uri="{FF2B5EF4-FFF2-40B4-BE49-F238E27FC236}">
+                <a16:creationId xmlns:a16="http://schemas.microsoft.com/office/drawing/2014/main" id="{FB5CD0E9-78A3-3F77-F640-334E7BDC967F}"/>
+              </a:ext>
+            </a:extLst>
+          </p:cNvPr>
+          <p:cNvSpPr>
+            <a:spLocks noGrp="1"/>
+          </p:cNvSpPr>
+          <p:nvPr>
+            <p:ph type="title"/>
+          </p:nvPr>
+        </p:nvSpPr>
+        <p:spPr/>
+        <p:txBody>
+          <a:bodyPr>
+            <a:normAutofit fontScale="90000"/>
+          </a:bodyPr>
+          <a:lstStyle/>
+          <a:p>
+            <a:r>
+              <a:rPr lang="en-US" noProof="0" dirty="0"/>
               <a:t>Results – Storage Reduction</a:t>
             </a:r>
           </a:p>
@@ -11984,7 +12731,7 @@
             <a:fld id="{9C057DB4-583E-41A7-BD94-987342018C17}" type="slidenum">
               <a:rPr lang="en-US" noProof="0" smtClean="0"/>
               <a:pPr/>
-              <a:t>8</a:t>
+              <a:t>9</a:t>
             </a:fld>
             <a:endParaRPr lang="en-US" noProof="0" dirty="0"/>
           </a:p>
@@ -12003,7 +12750,7 @@
           <p:nvPr>
             <p:extLst>
               <p:ext uri="{D42A27DB-BD31-4B8C-83A1-F6EECF244321}">
-                <p14:modId xmlns:p14="http://schemas.microsoft.com/office/powerpoint/2010/main" val="672807409"/>
+                <p14:modId xmlns:p14="http://schemas.microsoft.com/office/powerpoint/2010/main" val="48674640"/>
               </p:ext>
             </p:extLst>
           </p:nvPr>
@@ -12033,7 +12780,7 @@
           <p:nvPr>
             <p:extLst>
               <p:ext uri="{D42A27DB-BD31-4B8C-83A1-F6EECF244321}">
-                <p14:modId xmlns:p14="http://schemas.microsoft.com/office/powerpoint/2010/main" val="1526421334"/>
+                <p14:modId xmlns:p14="http://schemas.microsoft.com/office/powerpoint/2010/main" val="1964760176"/>
               </p:ext>
             </p:extLst>
           </p:nvPr>
@@ -12954,232 +13701,6 @@
 </p:sld>
 </file>
 
-<file path=ppt/slides/slide9.xml><?xml version="1.0" encoding="utf-8"?>
-<p:sld xmlns:a="http://schemas.openxmlformats.org/drawingml/2006/main" xmlns:r="http://schemas.openxmlformats.org/officeDocument/2006/relationships" xmlns:p="http://schemas.openxmlformats.org/presentationml/2006/main">
-  <p:cSld>
-    <p:spTree>
-      <p:nvGrpSpPr>
-        <p:cNvPr id="1" name=""/>
-        <p:cNvGrpSpPr/>
-        <p:nvPr/>
-      </p:nvGrpSpPr>
-      <p:grpSpPr>
-        <a:xfrm>
-          <a:off x="0" y="0"/>
-          <a:ext cx="0" cy="0"/>
-          <a:chOff x="0" y="0"/>
-          <a:chExt cx="0" cy="0"/>
-        </a:xfrm>
-      </p:grpSpPr>
-      <p:sp>
-        <p:nvSpPr>
-          <p:cNvPr id="2" name="Titel 1">
-            <a:extLst>
-              <a:ext uri="{FF2B5EF4-FFF2-40B4-BE49-F238E27FC236}">
-                <a16:creationId xmlns:a16="http://schemas.microsoft.com/office/drawing/2014/main" id="{DC2402EF-DB24-CC4D-790D-D495AEE1BDFE}"/>
-              </a:ext>
-            </a:extLst>
-          </p:cNvPr>
-          <p:cNvSpPr>
-            <a:spLocks noGrp="1"/>
-          </p:cNvSpPr>
-          <p:nvPr>
-            <p:ph type="title"/>
-          </p:nvPr>
-        </p:nvSpPr>
-        <p:spPr/>
-        <p:txBody>
-          <a:bodyPr>
-            <a:normAutofit fontScale="90000"/>
-          </a:bodyPr>
-          <a:lstStyle/>
-          <a:p>
-            <a:r>
-              <a:rPr lang="en-US" noProof="0" dirty="0"/>
-              <a:t>Results – Policy Agreement &amp; Q-value Error </a:t>
-            </a:r>
-          </a:p>
-        </p:txBody>
-      </p:sp>
-      <p:sp>
-        <p:nvSpPr>
-          <p:cNvPr id="3" name="Textplatzhalter 2">
-            <a:extLst>
-              <a:ext uri="{FF2B5EF4-FFF2-40B4-BE49-F238E27FC236}">
-                <a16:creationId xmlns:a16="http://schemas.microsoft.com/office/drawing/2014/main" id="{9F889880-B199-B6DB-E107-844A3B932C8A}"/>
-              </a:ext>
-            </a:extLst>
-          </p:cNvPr>
-          <p:cNvSpPr>
-            <a:spLocks noGrp="1"/>
-          </p:cNvSpPr>
-          <p:nvPr>
-            <p:ph type="body" sz="quarter" idx="14"/>
-          </p:nvPr>
-        </p:nvSpPr>
-        <p:spPr/>
-        <p:txBody>
-          <a:bodyPr/>
-          <a:lstStyle/>
-          <a:p>
-            <a:r>
-              <a:rPr lang="en-US" noProof="0" dirty="0"/>
-              <a:t>Policy agreement never below 99,6 percent</a:t>
-            </a:r>
-          </a:p>
-          <a:p>
-            <a:r>
-              <a:rPr lang="en-US" noProof="0" dirty="0"/>
-              <a:t>Average q-error less than 0,5</a:t>
-            </a:r>
-          </a:p>
-          <a:p>
-            <a:r>
-              <a:rPr lang="en-US" noProof="0" dirty="0"/>
-              <a:t>Game performance nearly identical</a:t>
-            </a:r>
-          </a:p>
-          <a:p>
-            <a:r>
-              <a:rPr lang="en-US" noProof="0" dirty="0"/>
-              <a:t>But q-values not the same</a:t>
-            </a:r>
-          </a:p>
-          <a:p>
-            <a:pPr marL="0" indent="0">
-              <a:buNone/>
-            </a:pPr>
-            <a:endParaRPr lang="en-US" noProof="0" dirty="0"/>
-          </a:p>
-        </p:txBody>
-      </p:sp>
-      <p:sp>
-        <p:nvSpPr>
-          <p:cNvPr id="4" name="Fußzeilenplatzhalter 3">
-            <a:extLst>
-              <a:ext uri="{FF2B5EF4-FFF2-40B4-BE49-F238E27FC236}">
-                <a16:creationId xmlns:a16="http://schemas.microsoft.com/office/drawing/2014/main" id="{4FCD61B2-C647-5CC6-45DC-158F98212E36}"/>
-              </a:ext>
-            </a:extLst>
-          </p:cNvPr>
-          <p:cNvSpPr>
-            <a:spLocks noGrp="1"/>
-          </p:cNvSpPr>
-          <p:nvPr>
-            <p:ph type="ftr" sz="quarter" idx="12"/>
-          </p:nvPr>
-        </p:nvSpPr>
-        <p:spPr/>
-        <p:txBody>
-          <a:bodyPr/>
-          <a:lstStyle/>
-          <a:p>
-            <a:r>
-              <a:rPr lang="en-US" noProof="0" dirty="0"/>
-              <a:t>Root-State and Child-State Q-table Abstraction | Stefan Werner | 31.05.2026</a:t>
-            </a:r>
-          </a:p>
-        </p:txBody>
-      </p:sp>
-      <p:sp>
-        <p:nvSpPr>
-          <p:cNvPr id="5" name="Foliennummernplatzhalter 4">
-            <a:extLst>
-              <a:ext uri="{FF2B5EF4-FFF2-40B4-BE49-F238E27FC236}">
-                <a16:creationId xmlns:a16="http://schemas.microsoft.com/office/drawing/2014/main" id="{2010D757-2494-8C2B-0312-CC46032B644F}"/>
-              </a:ext>
-            </a:extLst>
-          </p:cNvPr>
-          <p:cNvSpPr>
-            <a:spLocks noGrp="1"/>
-          </p:cNvSpPr>
-          <p:nvPr>
-            <p:ph type="sldNum" sz="quarter" idx="13"/>
-          </p:nvPr>
-        </p:nvSpPr>
-        <p:spPr/>
-        <p:txBody>
-          <a:bodyPr/>
-          <a:lstStyle/>
-          <a:p>
-            <a:fld id="{9C057DB4-583E-41A7-BD94-987342018C17}" type="slidenum">
-              <a:rPr lang="en-US" noProof="0" smtClean="0"/>
-              <a:pPr/>
-              <a:t>9</a:t>
-            </a:fld>
-            <a:endParaRPr lang="en-US" noProof="0" dirty="0"/>
-          </a:p>
-        </p:txBody>
-      </p:sp>
-      <p:graphicFrame>
-        <p:nvGraphicFramePr>
-          <p:cNvPr id="6" name="Chart 0">
-            <a:extLst>
-              <a:ext uri="{FF2B5EF4-FFF2-40B4-BE49-F238E27FC236}">
-                <a16:creationId xmlns:a16="http://schemas.microsoft.com/office/drawing/2014/main" id="{1323C5CB-7318-280D-4E82-E1FAD85D71BA}"/>
-              </a:ext>
-            </a:extLst>
-          </p:cNvPr>
-          <p:cNvGraphicFramePr/>
-          <p:nvPr>
-            <p:extLst>
-              <p:ext uri="{D42A27DB-BD31-4B8C-83A1-F6EECF244321}">
-                <p14:modId xmlns:p14="http://schemas.microsoft.com/office/powerpoint/2010/main" val="3477981672"/>
-              </p:ext>
-            </p:extLst>
-          </p:nvPr>
-        </p:nvGraphicFramePr>
-        <p:xfrm>
-          <a:off x="377946" y="2131022"/>
-          <a:ext cx="4058049" cy="2370028"/>
-        </p:xfrm>
-        <a:graphic>
-          <a:graphicData uri="http://schemas.openxmlformats.org/drawingml/2006/chart">
-            <c:chart xmlns:c="http://schemas.openxmlformats.org/drawingml/2006/chart" xmlns:r="http://schemas.openxmlformats.org/officeDocument/2006/relationships" r:id="rId2"/>
-          </a:graphicData>
-        </a:graphic>
-      </p:graphicFrame>
-      <p:graphicFrame>
-        <p:nvGraphicFramePr>
-          <p:cNvPr id="7" name="Chart 1">
-            <a:extLst>
-              <a:ext uri="{FF2B5EF4-FFF2-40B4-BE49-F238E27FC236}">
-                <a16:creationId xmlns:a16="http://schemas.microsoft.com/office/drawing/2014/main" id="{C2D234A8-907F-7C02-4820-525F84344AD0}"/>
-              </a:ext>
-            </a:extLst>
-          </p:cNvPr>
-          <p:cNvGraphicFramePr/>
-          <p:nvPr>
-            <p:extLst>
-              <p:ext uri="{D42A27DB-BD31-4B8C-83A1-F6EECF244321}">
-                <p14:modId xmlns:p14="http://schemas.microsoft.com/office/powerpoint/2010/main" val="3163483009"/>
-              </p:ext>
-            </p:extLst>
-          </p:nvPr>
-        </p:nvGraphicFramePr>
-        <p:xfrm>
-          <a:off x="4633940" y="2131022"/>
-          <a:ext cx="4272194" cy="2508408"/>
-        </p:xfrm>
-        <a:graphic>
-          <a:graphicData uri="http://schemas.openxmlformats.org/drawingml/2006/chart">
-            <c:chart xmlns:c="http://schemas.openxmlformats.org/drawingml/2006/chart" xmlns:r="http://schemas.openxmlformats.org/officeDocument/2006/relationships" r:id="rId3"/>
-          </a:graphicData>
-        </a:graphic>
-      </p:graphicFrame>
-    </p:spTree>
-    <p:extLst>
-      <p:ext uri="{BB962C8B-B14F-4D97-AF65-F5344CB8AC3E}">
-        <p14:creationId xmlns:p14="http://schemas.microsoft.com/office/powerpoint/2010/main" val="3829154241"/>
-      </p:ext>
-    </p:extLst>
-  </p:cSld>
-  <p:clrMapOvr>
-    <a:masterClrMapping/>
-  </p:clrMapOvr>
-</p:sld>
-</file>
-
 <file path=ppt/theme/theme1.xml><?xml version="1.0" encoding="utf-8"?>
 <a:theme xmlns:a="http://schemas.openxmlformats.org/drawingml/2006/main" name="Office">
   <a:themeElements>
@@ -13950,9 +14471,12 @@
 </file>
 
 <file path=customXml/item1.xml><?xml version="1.0" encoding="utf-8"?>
-<p:properties xmlns:p="http://schemas.microsoft.com/office/2006/metadata/properties" xmlns:xsi="http://www.w3.org/2001/XMLSchema-instance" xmlns:pc="http://schemas.microsoft.com/office/infopath/2007/PartnerControls">
-  <documentManagement/>
-</p:properties>
+<?mso-contentType ?>
+<FormTemplates xmlns="http://schemas.microsoft.com/sharepoint/v3/contenttype/forms">
+  <Display>DocumentLibraryForm</Display>
+  <Edit>DocumentLibraryForm</Edit>
+  <New>DocumentLibraryForm</New>
+</FormTemplates>
 </file>
 
 <file path=customXml/item2.xml><?xml version="1.0" encoding="utf-8"?>
@@ -14106,26 +14630,15 @@
 </file>
 
 <file path=customXml/item3.xml><?xml version="1.0" encoding="utf-8"?>
-<?mso-contentType ?>
-<FormTemplates xmlns="http://schemas.microsoft.com/sharepoint/v3/contenttype/forms">
-  <Display>DocumentLibraryForm</Display>
-  <Edit>DocumentLibraryForm</Edit>
-  <New>DocumentLibraryForm</New>
-</FormTemplates>
+<p:properties xmlns:p="http://schemas.microsoft.com/office/2006/metadata/properties" xmlns:xsi="http://www.w3.org/2001/XMLSchema-instance" xmlns:pc="http://schemas.microsoft.com/office/infopath/2007/PartnerControls">
+  <documentManagement/>
+</p:properties>
 </file>
 
 <file path=customXml/itemProps1.xml><?xml version="1.0" encoding="utf-8"?>
-<ds:datastoreItem xmlns:ds="http://schemas.openxmlformats.org/officeDocument/2006/customXml" ds:itemID="{EE70B53E-5918-4A48-B895-E57A7C6FD7C8}">
+<ds:datastoreItem xmlns:ds="http://schemas.openxmlformats.org/officeDocument/2006/customXml" ds:itemID="{DB66ED67-DB0D-40B3-9F54-7F30370BB7A1}">
   <ds:schemaRefs>
-    <ds:schemaRef ds:uri="http://www.w3.org/XML/1998/namespace"/>
-    <ds:schemaRef ds:uri="http://purl.org/dc/terms/"/>
-    <ds:schemaRef ds:uri="http://purl.org/dc/dcmitype/"/>
-    <ds:schemaRef ds:uri="http://purl.org/dc/elements/1.1/"/>
-    <ds:schemaRef ds:uri="0cfff6e3-632b-49cb-b70b-702b936689ff"/>
-    <ds:schemaRef ds:uri="http://schemas.microsoft.com/office/2006/documentManagement/types"/>
-    <ds:schemaRef ds:uri="http://schemas.microsoft.com/office/2006/metadata/properties"/>
-    <ds:schemaRef ds:uri="http://schemas.microsoft.com/office/infopath/2007/PartnerControls"/>
-    <ds:schemaRef ds:uri="http://schemas.openxmlformats.org/package/2006/metadata/core-properties"/>
+    <ds:schemaRef ds:uri="http://schemas.microsoft.com/sharepoint/v3/contenttype/forms"/>
   </ds:schemaRefs>
 </ds:datastoreItem>
 </file>
@@ -14149,9 +14662,17 @@
 </file>
 
 <file path=customXml/itemProps3.xml><?xml version="1.0" encoding="utf-8"?>
-<ds:datastoreItem xmlns:ds="http://schemas.openxmlformats.org/officeDocument/2006/customXml" ds:itemID="{DB66ED67-DB0D-40B3-9F54-7F30370BB7A1}">
+<ds:datastoreItem xmlns:ds="http://schemas.openxmlformats.org/officeDocument/2006/customXml" ds:itemID="{EE70B53E-5918-4A48-B895-E57A7C6FD7C8}">
   <ds:schemaRefs>
-    <ds:schemaRef ds:uri="http://schemas.microsoft.com/sharepoint/v3/contenttype/forms"/>
+    <ds:schemaRef ds:uri="http://www.w3.org/XML/1998/namespace"/>
+    <ds:schemaRef ds:uri="http://purl.org/dc/terms/"/>
+    <ds:schemaRef ds:uri="http://purl.org/dc/dcmitype/"/>
+    <ds:schemaRef ds:uri="http://purl.org/dc/elements/1.1/"/>
+    <ds:schemaRef ds:uri="0cfff6e3-632b-49cb-b70b-702b936689ff"/>
+    <ds:schemaRef ds:uri="http://schemas.microsoft.com/office/2006/documentManagement/types"/>
+    <ds:schemaRef ds:uri="http://schemas.microsoft.com/office/2006/metadata/properties"/>
+    <ds:schemaRef ds:uri="http://schemas.microsoft.com/office/infopath/2007/PartnerControls"/>
+    <ds:schemaRef ds:uri="http://schemas.openxmlformats.org/package/2006/metadata/core-properties"/>
   </ds:schemaRefs>
 </ds:datastoreItem>
 </file>
--- a/Thesis/Development of a root-state and child-state abstraction algorithm.pptx
+++ b/Thesis/Development of a root-state and child-state abstraction algorithm.pptx
@@ -11523,8 +11523,8 @@
           </a:p>
         </p:txBody>
       </p:sp>
-      <mc:AlternateContent xmlns:mc="http://schemas.openxmlformats.org/markup-compatibility/2006">
-        <mc:Choice xmlns:a14="http://schemas.microsoft.com/office/drawing/2010/main" Requires="a14">
+      <mc:AlternateContent xmlns:mc="http://schemas.openxmlformats.org/markup-compatibility/2006" xmlns:a14="http://schemas.microsoft.com/office/drawing/2010/main">
+        <mc:Choice Requires="a14">
           <p:sp>
             <p:nvSpPr>
               <p:cNvPr id="3" name="Textplatzhalter 2">
@@ -12453,7 +12453,7 @@
             </p:txBody>
           </p:sp>
         </mc:Choice>
-        <mc:Fallback>
+        <mc:Fallback xmlns="">
           <p:sp>
             <p:nvSpPr>
               <p:cNvPr id="3" name="Textplatzhalter 2">
@@ -14471,15 +14471,6 @@
 </file>
 
 <file path=customXml/item1.xml><?xml version="1.0" encoding="utf-8"?>
-<?mso-contentType ?>
-<FormTemplates xmlns="http://schemas.microsoft.com/sharepoint/v3/contenttype/forms">
-  <Display>DocumentLibraryForm</Display>
-  <Edit>DocumentLibraryForm</Edit>
-  <New>DocumentLibraryForm</New>
-</FormTemplates>
-</file>
-
-<file path=customXml/item2.xml><?xml version="1.0" encoding="utf-8"?>
 <ct:contentTypeSchema xmlns:ct="http://schemas.microsoft.com/office/2006/metadata/contentType" xmlns:ma="http://schemas.microsoft.com/office/2006/metadata/properties/metaAttributes" ct:_="" ma:_="" ma:contentTypeName="Dokument" ma:contentTypeID="0x01010045A6A176E201304DBCA7A45266A0DAAE" ma:contentTypeVersion="5" ma:contentTypeDescription="Ein neues Dokument erstellen." ma:contentTypeScope="" ma:versionID="d88ff1cb79a342c70fa6bb8aeaf67b39">
   <xsd:schema xmlns:xsd="http://www.w3.org/2001/XMLSchema" xmlns:xs="http://www.w3.org/2001/XMLSchema" xmlns:p="http://schemas.microsoft.com/office/2006/metadata/properties" xmlns:ns3="0cfff6e3-632b-49cb-b70b-702b936689ff" targetNamespace="http://schemas.microsoft.com/office/2006/metadata/properties" ma:root="true" ma:fieldsID="93c081cb8b485355971f8d67c31482cf" ns3:_="">
     <xsd:import namespace="0cfff6e3-632b-49cb-b70b-702b936689ff"/>
@@ -14629,6 +14620,15 @@
 </ct:contentTypeSchema>
 </file>
 
+<file path=customXml/item2.xml><?xml version="1.0" encoding="utf-8"?>
+<?mso-contentType ?>
+<FormTemplates xmlns="http://schemas.microsoft.com/sharepoint/v3/contenttype/forms">
+  <Display>DocumentLibraryForm</Display>
+  <Edit>DocumentLibraryForm</Edit>
+  <New>DocumentLibraryForm</New>
+</FormTemplates>
+</file>
+
 <file path=customXml/item3.xml><?xml version="1.0" encoding="utf-8"?>
 <p:properties xmlns:p="http://schemas.microsoft.com/office/2006/metadata/properties" xmlns:xsi="http://www.w3.org/2001/XMLSchema-instance" xmlns:pc="http://schemas.microsoft.com/office/infopath/2007/PartnerControls">
   <documentManagement/>
@@ -14636,14 +14636,6 @@
 </file>
 
 <file path=customXml/itemProps1.xml><?xml version="1.0" encoding="utf-8"?>
-<ds:datastoreItem xmlns:ds="http://schemas.openxmlformats.org/officeDocument/2006/customXml" ds:itemID="{DB66ED67-DB0D-40B3-9F54-7F30370BB7A1}">
-  <ds:schemaRefs>
-    <ds:schemaRef ds:uri="http://schemas.microsoft.com/sharepoint/v3/contenttype/forms"/>
-  </ds:schemaRefs>
-</ds:datastoreItem>
-</file>
-
-<file path=customXml/itemProps2.xml><?xml version="1.0" encoding="utf-8"?>
 <ds:datastoreItem xmlns:ds="http://schemas.openxmlformats.org/officeDocument/2006/customXml" ds:itemID="{EFB10ABA-C20B-4DD7-8166-4C8134DFECA8}">
   <ds:schemaRefs>
     <ds:schemaRef ds:uri="http://schemas.microsoft.com/office/2006/metadata/contentType"/>
@@ -14657,6 +14649,14 @@
     <ds:schemaRef ds:uri="http://purl.org/dc/elements/1.1/"/>
     <ds:schemaRef ds:uri="http://purl.org/dc/terms/"/>
     <ds:schemaRef ds:uri="http://schemas.microsoft.com/internal/obd"/>
+  </ds:schemaRefs>
+</ds:datastoreItem>
+</file>
+
+<file path=customXml/itemProps2.xml><?xml version="1.0" encoding="utf-8"?>
+<ds:datastoreItem xmlns:ds="http://schemas.openxmlformats.org/officeDocument/2006/customXml" ds:itemID="{DB66ED67-DB0D-40B3-9F54-7F30370BB7A1}">
+  <ds:schemaRefs>
+    <ds:schemaRef ds:uri="http://schemas.microsoft.com/sharepoint/v3/contenttype/forms"/>
   </ds:schemaRefs>
 </ds:datastoreItem>
 </file>
